--- a/public/lessons/year-6-maths/summer/week-24/find-missing-dimensions/teaching-powerpoint-v1.pptx
+++ b/public/lessons/year-6-maths/summer/week-24/find-missing-dimensions/teaching-powerpoint-v1.pptx
@@ -2,24 +2,24 @@
 <file path=ppt/presentation.xml><?xml version="1.0" encoding="utf-8"?>
 <p:presentation xmlns:p="http://schemas.openxmlformats.org/presentationml/2006/main">
   <p:sldMasterIdLst>
-    <p:sldMasterId xmlns:r="http://schemas.openxmlformats.org/officeDocument/2006/relationships" id="2147483648" r:id="R302335267db5413b"/>
+    <p:sldMasterId xmlns:r="http://schemas.openxmlformats.org/officeDocument/2006/relationships" id="2147483648" r:id="Rcb18010461b4484d"/>
   </p:sldMasterIdLst>
   <p:notesMasterIdLst>
-    <p:notesMasterId xmlns:r="http://schemas.openxmlformats.org/officeDocument/2006/relationships" r:id="Rd7368d6558624987"/>
+    <p:notesMasterId xmlns:r="http://schemas.openxmlformats.org/officeDocument/2006/relationships" r:id="R352feca6c8f040a3"/>
   </p:notesMasterIdLst>
   <p:sldIdLst>
-    <p:sldId xmlns:r="http://schemas.openxmlformats.org/officeDocument/2006/relationships" id="256" r:id="R84f83165bade4b42"/>
-    <p:sldId xmlns:r="http://schemas.openxmlformats.org/officeDocument/2006/relationships" id="257" r:id="Rbe7dfd42af534233"/>
-    <p:sldId xmlns:r="http://schemas.openxmlformats.org/officeDocument/2006/relationships" id="258" r:id="R0e52a098ba7949b0"/>
-    <p:sldId xmlns:r="http://schemas.openxmlformats.org/officeDocument/2006/relationships" id="259" r:id="R6f67468650204a27"/>
-    <p:sldId xmlns:r="http://schemas.openxmlformats.org/officeDocument/2006/relationships" id="260" r:id="R9eb3b04e4edf46d8"/>
-    <p:sldId xmlns:r="http://schemas.openxmlformats.org/officeDocument/2006/relationships" id="261" r:id="R149dda52225d444d"/>
-    <p:sldId xmlns:r="http://schemas.openxmlformats.org/officeDocument/2006/relationships" id="262" r:id="Rff9d86a85b4c4e49"/>
-    <p:sldId xmlns:r="http://schemas.openxmlformats.org/officeDocument/2006/relationships" id="263" r:id="R3f1992f7e0b34188"/>
-    <p:sldId xmlns:r="http://schemas.openxmlformats.org/officeDocument/2006/relationships" id="264" r:id="Rbf94e73b47194a94"/>
-    <p:sldId xmlns:r="http://schemas.openxmlformats.org/officeDocument/2006/relationships" id="265" r:id="Reab9c5a5d3f14bcd"/>
-    <p:sldId xmlns:r="http://schemas.openxmlformats.org/officeDocument/2006/relationships" id="266" r:id="R77eb6c04eb394310"/>
-    <p:sldId xmlns:r="http://schemas.openxmlformats.org/officeDocument/2006/relationships" id="267" r:id="Rcb84a711a4fd4f61"/>
+    <p:sldId xmlns:r="http://schemas.openxmlformats.org/officeDocument/2006/relationships" id="256" r:id="Rf95047076ad44712"/>
+    <p:sldId xmlns:r="http://schemas.openxmlformats.org/officeDocument/2006/relationships" id="257" r:id="Ra96ce2f9afdb4720"/>
+    <p:sldId xmlns:r="http://schemas.openxmlformats.org/officeDocument/2006/relationships" id="258" r:id="R100c39589da0494d"/>
+    <p:sldId xmlns:r="http://schemas.openxmlformats.org/officeDocument/2006/relationships" id="259" r:id="Rd160da3cd560457c"/>
+    <p:sldId xmlns:r="http://schemas.openxmlformats.org/officeDocument/2006/relationships" id="260" r:id="R3d831bca85fe4236"/>
+    <p:sldId xmlns:r="http://schemas.openxmlformats.org/officeDocument/2006/relationships" id="261" r:id="R77224a8ee7a54687"/>
+    <p:sldId xmlns:r="http://schemas.openxmlformats.org/officeDocument/2006/relationships" id="262" r:id="R48d9f139a4ed4313"/>
+    <p:sldId xmlns:r="http://schemas.openxmlformats.org/officeDocument/2006/relationships" id="263" r:id="Rd7b218b96ae4497b"/>
+    <p:sldId xmlns:r="http://schemas.openxmlformats.org/officeDocument/2006/relationships" id="264" r:id="R8cedbe363dea4aec"/>
+    <p:sldId xmlns:r="http://schemas.openxmlformats.org/officeDocument/2006/relationships" id="265" r:id="Rebe7117eacf842f6"/>
+    <p:sldId xmlns:r="http://schemas.openxmlformats.org/officeDocument/2006/relationships" id="266" r:id="R363283a233124bce"/>
+    <p:sldId xmlns:r="http://schemas.openxmlformats.org/officeDocument/2006/relationships" id="267" r:id="R3e17087149e74905"/>
   </p:sldIdLst>
   <p:sldSz cx="12192000" cy="6858000"/>
   <p:notesSz cx="6858000" cy="9144000"/>
@@ -873,7 +873,7 @@
           <a:lstStyle xmlns:a="http://schemas.openxmlformats.org/drawingml/2006/main"/>
           <a:p xmlns:a="http://schemas.openxmlformats.org/drawingml/2006/main">
             <a:r>
-              <a:t>I do. Reveal the question, setup and each calculation stage one click at a time. Pupils watch before copying. Model answer: 9 cm.</a:t>
+              <a:t>I do. Reveal the question, then reveal each mathematical change one click at a time. Point to the numbers and operation that changed before moving to the next line. Final answer: 9 cm.</a:t>
             </a:r>
           </a:p>
         </p:txBody>
@@ -1291,7 +1291,7 @@
   </p:cSld>
   <p:clrMap bg1="lt1" tx1="dk1" bg2="lt2" tx2="dk2" accent1="accent1" accent2="accent2" accent3="accent3" accent4="accent4" accent5="accent5" accent6="accent6" hlink="hlink" folHlink="folHlink"/>
   <p:sldLayoutIdLst>
-    <p:sldLayoutId xmlns:r="http://schemas.openxmlformats.org/officeDocument/2006/relationships" id="2147483649" r:id="R711f136f40e742ad"/>
+    <p:sldLayoutId xmlns:r="http://schemas.openxmlformats.org/officeDocument/2006/relationships" id="2147483649" r:id="R05b6b14031774d54"/>
   </p:sldLayoutIdLst>
   <p:txStyles>
     <p:titleStyle>
@@ -1842,7 +1842,7 @@
           <p:cNvPr id="12" name="">
             <a:extLst xmlns:a="http://schemas.openxmlformats.org/drawingml/2006/main">
               <a:ext uri="{FF2B5EF4-FFF2-40B4-BE49-F238E27FC236}">
-                <a16:creationId xmlns:a16="http://schemas.microsoft.com/office/drawing/2014/main" id="{8A93A8FA-F726-4C9D-A7AF-B64E25AF40A9}"/>
+                <a16:creationId xmlns:a16="http://schemas.microsoft.com/office/drawing/2014/main" id="{DEF1C90C-0B9A-4A18-848C-113632F9B3BD}"/>
               </a:ext>
             </a:extLst>
           </p:cNvPr>
@@ -1874,7 +1874,7 @@
           <p:cNvPr id="2" name="">
             <a:extLst xmlns:a="http://schemas.openxmlformats.org/drawingml/2006/main">
               <a:ext uri="{FF2B5EF4-FFF2-40B4-BE49-F238E27FC236}">
-                <a16:creationId xmlns:a16="http://schemas.microsoft.com/office/drawing/2014/main" id="{1FE7358D-55D0-4852-9271-D748A575BD70}"/>
+                <a16:creationId xmlns:a16="http://schemas.microsoft.com/office/drawing/2014/main" id="{8D2965D9-0763-4250-B7EF-6217874EC937}"/>
               </a:ext>
             </a:extLst>
           </p:cNvPr>
@@ -1931,7 +1931,7 @@
           <p:cNvPr id="3" name="">
             <a:extLst xmlns:a="http://schemas.openxmlformats.org/drawingml/2006/main">
               <a:ext uri="{FF2B5EF4-FFF2-40B4-BE49-F238E27FC236}">
-                <a16:creationId xmlns:a16="http://schemas.microsoft.com/office/drawing/2014/main" id="{DEA05CB6-155A-4A1D-BBB1-50E979AFFAB6}"/>
+                <a16:creationId xmlns:a16="http://schemas.microsoft.com/office/drawing/2014/main" id="{F9F7EBA3-745E-49D0-ADEC-7820C0A1FBB0}"/>
               </a:ext>
             </a:extLst>
           </p:cNvPr>
@@ -1965,7 +1965,7 @@
           <p:cNvPr id="4" name="">
             <a:extLst xmlns:a="http://schemas.openxmlformats.org/drawingml/2006/main">
               <a:ext uri="{FF2B5EF4-FFF2-40B4-BE49-F238E27FC236}">
-                <a16:creationId xmlns:a16="http://schemas.microsoft.com/office/drawing/2014/main" id="{54468D96-1C13-49B3-90C7-20CB57076AD9}"/>
+                <a16:creationId xmlns:a16="http://schemas.microsoft.com/office/drawing/2014/main" id="{10F10C3C-551A-4436-93DA-538188987905}"/>
               </a:ext>
             </a:extLst>
           </p:cNvPr>
@@ -2022,7 +2022,7 @@
           <p:cNvPr id="5" name="">
             <a:extLst xmlns:a="http://schemas.openxmlformats.org/drawingml/2006/main">
               <a:ext uri="{FF2B5EF4-FFF2-40B4-BE49-F238E27FC236}">
-                <a16:creationId xmlns:a16="http://schemas.microsoft.com/office/drawing/2014/main" id="{D6296ABB-3D8A-47F4-A45F-A1D18489F192}"/>
+                <a16:creationId xmlns:a16="http://schemas.microsoft.com/office/drawing/2014/main" id="{3E64EC49-B801-4390-9096-A91190427728}"/>
               </a:ext>
             </a:extLst>
           </p:cNvPr>
@@ -2079,7 +2079,7 @@
           <p:cNvPr id="6" name="">
             <a:extLst xmlns:a="http://schemas.openxmlformats.org/drawingml/2006/main">
               <a:ext uri="{FF2B5EF4-FFF2-40B4-BE49-F238E27FC236}">
-                <a16:creationId xmlns:a16="http://schemas.microsoft.com/office/drawing/2014/main" id="{0260D55A-5806-4EB9-B7B3-D9DCF8BC3469}"/>
+                <a16:creationId xmlns:a16="http://schemas.microsoft.com/office/drawing/2014/main" id="{E31F7757-3037-40D9-A37E-1F5AC23F7DFF}"/>
               </a:ext>
             </a:extLst>
           </p:cNvPr>
@@ -2113,7 +2113,7 @@
           <p:cNvPr id="7" name="">
             <a:extLst xmlns:a="http://schemas.openxmlformats.org/drawingml/2006/main">
               <a:ext uri="{FF2B5EF4-FFF2-40B4-BE49-F238E27FC236}">
-                <a16:creationId xmlns:a16="http://schemas.microsoft.com/office/drawing/2014/main" id="{0BF0375B-DBA1-477D-8411-8F783A6B6747}"/>
+                <a16:creationId xmlns:a16="http://schemas.microsoft.com/office/drawing/2014/main" id="{60EAA80A-2B42-456F-9DC1-AAC851023EB0}"/>
               </a:ext>
             </a:extLst>
           </p:cNvPr>
@@ -2170,7 +2170,7 @@
           <p:cNvPr id="8" name="">
             <a:extLst xmlns:a="http://schemas.openxmlformats.org/drawingml/2006/main">
               <a:ext uri="{FF2B5EF4-FFF2-40B4-BE49-F238E27FC236}">
-                <a16:creationId xmlns:a16="http://schemas.microsoft.com/office/drawing/2014/main" id="{97F7277B-E043-4D67-AF9A-557338C79772}"/>
+                <a16:creationId xmlns:a16="http://schemas.microsoft.com/office/drawing/2014/main" id="{E069BEE3-8AB7-4743-88D4-93826311D63E}"/>
               </a:ext>
             </a:extLst>
           </p:cNvPr>
@@ -2227,7 +2227,7 @@
           <p:cNvPr id="9" name="">
             <a:extLst xmlns:a="http://schemas.openxmlformats.org/drawingml/2006/main">
               <a:ext uri="{FF2B5EF4-FFF2-40B4-BE49-F238E27FC236}">
-                <a16:creationId xmlns:a16="http://schemas.microsoft.com/office/drawing/2014/main" id="{5F93F541-8F88-496D-BD3A-EAFC7BE372D6}"/>
+                <a16:creationId xmlns:a16="http://schemas.microsoft.com/office/drawing/2014/main" id="{03D85F25-FF21-4E4B-879A-A7093E23B9BF}"/>
               </a:ext>
             </a:extLst>
           </p:cNvPr>
@@ -2284,7 +2284,7 @@
           <p:cNvPr id="10" name="">
             <a:extLst xmlns:a="http://schemas.openxmlformats.org/drawingml/2006/main">
               <a:ext uri="{FF2B5EF4-FFF2-40B4-BE49-F238E27FC236}">
-                <a16:creationId xmlns:a16="http://schemas.microsoft.com/office/drawing/2014/main" id="{1A672798-91D0-46F6-9342-10A726F62E2E}"/>
+                <a16:creationId xmlns:a16="http://schemas.microsoft.com/office/drawing/2014/main" id="{349D0607-F937-4490-9A06-0B89E1C2B541}"/>
               </a:ext>
             </a:extLst>
           </p:cNvPr>
@@ -2341,7 +2341,7 @@
           <p:cNvPr id="11" name="">
             <a:extLst xmlns:a="http://schemas.openxmlformats.org/drawingml/2006/main">
               <a:ext uri="{FF2B5EF4-FFF2-40B4-BE49-F238E27FC236}">
-                <a16:creationId xmlns:a16="http://schemas.microsoft.com/office/drawing/2014/main" id="{7FEE2B93-4723-4BFC-8790-FFB0D807F335}"/>
+                <a16:creationId xmlns:a16="http://schemas.microsoft.com/office/drawing/2014/main" id="{EDA11174-4008-4A03-866C-DB5F304D3E77}"/>
               </a:ext>
             </a:extLst>
           </p:cNvPr>
@@ -2396,7 +2396,7 @@
     </p:spTree>
     <p:extLst>
       <p:ext uri="{BB962C8B-B14F-4D97-AF65-F5344CB8AC3E}">
-        <p14:creationId xmlns:p14="http://schemas.microsoft.com/office/powerpoint/2010/main" val="836393996"/>
+        <p14:creationId xmlns:p14="http://schemas.microsoft.com/office/powerpoint/2010/main" val="311587481"/>
       </p:ext>
     </p:extLst>
   </p:cSld>
@@ -2427,7 +2427,7 @@
           <p:cNvPr id="14" name="">
             <a:extLst xmlns:a="http://schemas.openxmlformats.org/drawingml/2006/main">
               <a:ext uri="{FF2B5EF4-FFF2-40B4-BE49-F238E27FC236}">
-                <a16:creationId xmlns:a16="http://schemas.microsoft.com/office/drawing/2014/main" id="{0B40123D-9714-4811-BAB1-B510A980A01F}"/>
+                <a16:creationId xmlns:a16="http://schemas.microsoft.com/office/drawing/2014/main" id="{077930A5-2E47-434A-AAF7-BE0ED0CAF417}"/>
               </a:ext>
             </a:extLst>
           </p:cNvPr>
@@ -2459,7 +2459,7 @@
           <p:cNvPr id="2" name="">
             <a:extLst xmlns:a="http://schemas.openxmlformats.org/drawingml/2006/main">
               <a:ext uri="{FF2B5EF4-FFF2-40B4-BE49-F238E27FC236}">
-                <a16:creationId xmlns:a16="http://schemas.microsoft.com/office/drawing/2014/main" id="{8EE5D4F4-0FF3-4DE9-A702-D642FC192129}"/>
+                <a16:creationId xmlns:a16="http://schemas.microsoft.com/office/drawing/2014/main" id="{0BEE162F-DBFC-4235-968C-F4E85830BE89}"/>
               </a:ext>
             </a:extLst>
           </p:cNvPr>
@@ -2516,7 +2516,7 @@
           <p:cNvPr id="3" name="">
             <a:extLst xmlns:a="http://schemas.openxmlformats.org/drawingml/2006/main">
               <a:ext uri="{FF2B5EF4-FFF2-40B4-BE49-F238E27FC236}">
-                <a16:creationId xmlns:a16="http://schemas.microsoft.com/office/drawing/2014/main" id="{2E15D17C-1106-4BA5-839C-C736A3F670EC}"/>
+                <a16:creationId xmlns:a16="http://schemas.microsoft.com/office/drawing/2014/main" id="{C9B4673F-C9C7-48A7-8017-E21151FBD173}"/>
               </a:ext>
             </a:extLst>
           </p:cNvPr>
@@ -2548,7 +2548,7 @@
           <p:cNvPr id="4" name="">
             <a:extLst xmlns:a="http://schemas.openxmlformats.org/drawingml/2006/main">
               <a:ext uri="{FF2B5EF4-FFF2-40B4-BE49-F238E27FC236}">
-                <a16:creationId xmlns:a16="http://schemas.microsoft.com/office/drawing/2014/main" id="{AA5C3F52-CA94-4E3D-915E-A476AD8ED228}"/>
+                <a16:creationId xmlns:a16="http://schemas.microsoft.com/office/drawing/2014/main" id="{E4933ED1-40FB-4557-8084-1B3D6EF661B6}"/>
               </a:ext>
             </a:extLst>
           </p:cNvPr>
@@ -2605,7 +2605,7 @@
           <p:cNvPr id="5" name="">
             <a:extLst xmlns:a="http://schemas.openxmlformats.org/drawingml/2006/main">
               <a:ext uri="{FF2B5EF4-FFF2-40B4-BE49-F238E27FC236}">
-                <a16:creationId xmlns:a16="http://schemas.microsoft.com/office/drawing/2014/main" id="{EE339342-C91C-4E70-B2C5-45193BEA88A0}"/>
+                <a16:creationId xmlns:a16="http://schemas.microsoft.com/office/drawing/2014/main" id="{54880681-3E57-45AF-96E1-77C07C2FC063}"/>
               </a:ext>
             </a:extLst>
           </p:cNvPr>
@@ -2662,7 +2662,7 @@
           <p:cNvPr id="6" name="">
             <a:extLst xmlns:a="http://schemas.openxmlformats.org/drawingml/2006/main">
               <a:ext uri="{FF2B5EF4-FFF2-40B4-BE49-F238E27FC236}">
-                <a16:creationId xmlns:a16="http://schemas.microsoft.com/office/drawing/2014/main" id="{2BA668E9-8228-4CD1-9B71-E5132D2AC626}"/>
+                <a16:creationId xmlns:a16="http://schemas.microsoft.com/office/drawing/2014/main" id="{E065CD65-5DDF-47AE-A228-618F1269AB8F}"/>
               </a:ext>
             </a:extLst>
           </p:cNvPr>
@@ -2719,7 +2719,7 @@
           <p:cNvPr id="7" name="">
             <a:extLst xmlns:a="http://schemas.openxmlformats.org/drawingml/2006/main">
               <a:ext uri="{FF2B5EF4-FFF2-40B4-BE49-F238E27FC236}">
-                <a16:creationId xmlns:a16="http://schemas.microsoft.com/office/drawing/2014/main" id="{8304DC94-3DF7-4A66-9CBA-2D8A1416E4ED}"/>
+                <a16:creationId xmlns:a16="http://schemas.microsoft.com/office/drawing/2014/main" id="{6748473A-B528-4D0B-8AD3-65F1FB27B4F4}"/>
               </a:ext>
             </a:extLst>
           </p:cNvPr>
@@ -2751,7 +2751,7 @@
           <p:cNvPr id="8" name="">
             <a:extLst xmlns:a="http://schemas.openxmlformats.org/drawingml/2006/main">
               <a:ext uri="{FF2B5EF4-FFF2-40B4-BE49-F238E27FC236}">
-                <a16:creationId xmlns:a16="http://schemas.microsoft.com/office/drawing/2014/main" id="{C80B0BEB-31F3-42DD-8DEC-3109FF1AA2DF}"/>
+                <a16:creationId xmlns:a16="http://schemas.microsoft.com/office/drawing/2014/main" id="{442A4548-EBF3-471F-84F1-FA381EAF6347}"/>
               </a:ext>
             </a:extLst>
           </p:cNvPr>
@@ -2808,7 +2808,7 @@
           <p:cNvPr id="9" name="">
             <a:extLst xmlns:a="http://schemas.openxmlformats.org/drawingml/2006/main">
               <a:ext uri="{FF2B5EF4-FFF2-40B4-BE49-F238E27FC236}">
-                <a16:creationId xmlns:a16="http://schemas.microsoft.com/office/drawing/2014/main" id="{3FF34325-8B75-47AA-8093-6EB0695486D3}"/>
+                <a16:creationId xmlns:a16="http://schemas.microsoft.com/office/drawing/2014/main" id="{E851950B-7FC3-4126-84F0-896E2BBAB6C6}"/>
               </a:ext>
             </a:extLst>
           </p:cNvPr>
@@ -2865,7 +2865,7 @@
           <p:cNvPr id="10" name="">
             <a:extLst xmlns:a="http://schemas.openxmlformats.org/drawingml/2006/main">
               <a:ext uri="{FF2B5EF4-FFF2-40B4-BE49-F238E27FC236}">
-                <a16:creationId xmlns:a16="http://schemas.microsoft.com/office/drawing/2014/main" id="{DC0C87B0-3571-45D7-9A0A-7CAC737CE6E5}"/>
+                <a16:creationId xmlns:a16="http://schemas.microsoft.com/office/drawing/2014/main" id="{31A6C837-4E3B-4BED-9008-0589149C7B31}"/>
               </a:ext>
             </a:extLst>
           </p:cNvPr>
@@ -2922,7 +2922,7 @@
           <p:cNvPr id="11" name="">
             <a:extLst xmlns:a="http://schemas.openxmlformats.org/drawingml/2006/main">
               <a:ext uri="{FF2B5EF4-FFF2-40B4-BE49-F238E27FC236}">
-                <a16:creationId xmlns:a16="http://schemas.microsoft.com/office/drawing/2014/main" id="{9312455C-2E5F-4F3D-8D55-59472FBEDB10}"/>
+                <a16:creationId xmlns:a16="http://schemas.microsoft.com/office/drawing/2014/main" id="{3934B384-1859-4A41-BB72-7C0BDC8098C0}"/>
               </a:ext>
             </a:extLst>
           </p:cNvPr>
@@ -2979,7 +2979,7 @@
           <p:cNvPr id="12" name="">
             <a:extLst xmlns:a="http://schemas.openxmlformats.org/drawingml/2006/main">
               <a:ext uri="{FF2B5EF4-FFF2-40B4-BE49-F238E27FC236}">
-                <a16:creationId xmlns:a16="http://schemas.microsoft.com/office/drawing/2014/main" id="{C12E351E-4480-498E-A722-5A761A3605F2}"/>
+                <a16:creationId xmlns:a16="http://schemas.microsoft.com/office/drawing/2014/main" id="{E144EA34-630F-41D9-BB20-8605165AC07C}"/>
               </a:ext>
             </a:extLst>
           </p:cNvPr>
@@ -3036,7 +3036,7 @@
           <p:cNvPr id="13" name="">
             <a:extLst xmlns:a="http://schemas.openxmlformats.org/drawingml/2006/main">
               <a:ext uri="{FF2B5EF4-FFF2-40B4-BE49-F238E27FC236}">
-                <a16:creationId xmlns:a16="http://schemas.microsoft.com/office/drawing/2014/main" id="{9546CA8A-3A6F-41AA-805E-5CCA79324912}"/>
+                <a16:creationId xmlns:a16="http://schemas.microsoft.com/office/drawing/2014/main" id="{8F3A0D8F-E9F5-4D35-A49D-AF1F912C7A2C}"/>
               </a:ext>
             </a:extLst>
           </p:cNvPr>
@@ -3091,7 +3091,7 @@
     </p:spTree>
     <p:extLst>
       <p:ext uri="{BB962C8B-B14F-4D97-AF65-F5344CB8AC3E}">
-        <p14:creationId xmlns:p14="http://schemas.microsoft.com/office/powerpoint/2010/main" val="1441990609"/>
+        <p14:creationId xmlns:p14="http://schemas.microsoft.com/office/powerpoint/2010/main" val="960556256"/>
       </p:ext>
     </p:extLst>
   </p:cSld>
@@ -3292,7 +3292,7 @@
           <p:cNvPr id="19" name="">
             <a:extLst xmlns:a="http://schemas.openxmlformats.org/drawingml/2006/main">
               <a:ext uri="{FF2B5EF4-FFF2-40B4-BE49-F238E27FC236}">
-                <a16:creationId xmlns:a16="http://schemas.microsoft.com/office/drawing/2014/main" id="{D20538FA-E85B-44F1-9961-8675F5B5281A}"/>
+                <a16:creationId xmlns:a16="http://schemas.microsoft.com/office/drawing/2014/main" id="{C2116DF0-A49A-457B-B03B-97629C4C5AAE}"/>
               </a:ext>
             </a:extLst>
           </p:cNvPr>
@@ -3324,7 +3324,7 @@
           <p:cNvPr id="2" name="">
             <a:extLst xmlns:a="http://schemas.openxmlformats.org/drawingml/2006/main">
               <a:ext uri="{FF2B5EF4-FFF2-40B4-BE49-F238E27FC236}">
-                <a16:creationId xmlns:a16="http://schemas.microsoft.com/office/drawing/2014/main" id="{3AB9538E-A555-40A4-B90F-61BD8EA2CFA5}"/>
+                <a16:creationId xmlns:a16="http://schemas.microsoft.com/office/drawing/2014/main" id="{96D19FBB-384B-4EAA-BBE3-7640948F0594}"/>
               </a:ext>
             </a:extLst>
           </p:cNvPr>
@@ -3381,7 +3381,7 @@
           <p:cNvPr id="3" name="">
             <a:extLst xmlns:a="http://schemas.openxmlformats.org/drawingml/2006/main">
               <a:ext uri="{FF2B5EF4-FFF2-40B4-BE49-F238E27FC236}">
-                <a16:creationId xmlns:a16="http://schemas.microsoft.com/office/drawing/2014/main" id="{66CE5BB7-A45D-4DE5-BE43-18C3A7727848}"/>
+                <a16:creationId xmlns:a16="http://schemas.microsoft.com/office/drawing/2014/main" id="{B32D3746-3361-43F9-A20B-7B3C904904C8}"/>
               </a:ext>
             </a:extLst>
           </p:cNvPr>
@@ -3413,7 +3413,7 @@
           <p:cNvPr id="4" name="">
             <a:extLst xmlns:a="http://schemas.openxmlformats.org/drawingml/2006/main">
               <a:ext uri="{FF2B5EF4-FFF2-40B4-BE49-F238E27FC236}">
-                <a16:creationId xmlns:a16="http://schemas.microsoft.com/office/drawing/2014/main" id="{2056ED19-5224-4F50-8840-C5A575B86EC5}"/>
+                <a16:creationId xmlns:a16="http://schemas.microsoft.com/office/drawing/2014/main" id="{86E1059F-DE8E-4106-8736-BB96EC08A047}"/>
               </a:ext>
             </a:extLst>
           </p:cNvPr>
@@ -3470,7 +3470,7 @@
           <p:cNvPr id="5" name="">
             <a:extLst xmlns:a="http://schemas.openxmlformats.org/drawingml/2006/main">
               <a:ext uri="{FF2B5EF4-FFF2-40B4-BE49-F238E27FC236}">
-                <a16:creationId xmlns:a16="http://schemas.microsoft.com/office/drawing/2014/main" id="{0B826903-3517-4771-97FB-6715F59E5430}"/>
+                <a16:creationId xmlns:a16="http://schemas.microsoft.com/office/drawing/2014/main" id="{2EBFCEFA-C5FD-4A83-B827-FA6F8E474F26}"/>
               </a:ext>
             </a:extLst>
           </p:cNvPr>
@@ -3527,7 +3527,7 @@
           <p:cNvPr id="6" name="">
             <a:extLst xmlns:a="http://schemas.openxmlformats.org/drawingml/2006/main">
               <a:ext uri="{FF2B5EF4-FFF2-40B4-BE49-F238E27FC236}">
-                <a16:creationId xmlns:a16="http://schemas.microsoft.com/office/drawing/2014/main" id="{08D1C527-A56F-4AA3-8607-6521696778CA}"/>
+                <a16:creationId xmlns:a16="http://schemas.microsoft.com/office/drawing/2014/main" id="{6B6E3614-06A5-4056-AF67-8D68515BE338}"/>
               </a:ext>
             </a:extLst>
           </p:cNvPr>
@@ -3584,7 +3584,7 @@
           <p:cNvPr id="7" name="">
             <a:extLst xmlns:a="http://schemas.openxmlformats.org/drawingml/2006/main">
               <a:ext uri="{FF2B5EF4-FFF2-40B4-BE49-F238E27FC236}">
-                <a16:creationId xmlns:a16="http://schemas.microsoft.com/office/drawing/2014/main" id="{015E3BCE-2CC7-40B4-BA5C-8EDDFE18DF8C}"/>
+                <a16:creationId xmlns:a16="http://schemas.microsoft.com/office/drawing/2014/main" id="{1DEBE308-3A93-4E7E-A2F9-44EC78CEAB46}"/>
               </a:ext>
             </a:extLst>
           </p:cNvPr>
@@ -3616,7 +3616,7 @@
           <p:cNvPr id="8" name="">
             <a:extLst xmlns:a="http://schemas.openxmlformats.org/drawingml/2006/main">
               <a:ext uri="{FF2B5EF4-FFF2-40B4-BE49-F238E27FC236}">
-                <a16:creationId xmlns:a16="http://schemas.microsoft.com/office/drawing/2014/main" id="{FF7D16D2-319E-4180-8326-5CA727198C25}"/>
+                <a16:creationId xmlns:a16="http://schemas.microsoft.com/office/drawing/2014/main" id="{CD07D537-5360-4D67-8322-25500B4087A5}"/>
               </a:ext>
             </a:extLst>
           </p:cNvPr>
@@ -3673,7 +3673,7 @@
           <p:cNvPr id="9" name="">
             <a:extLst xmlns:a="http://schemas.openxmlformats.org/drawingml/2006/main">
               <a:ext uri="{FF2B5EF4-FFF2-40B4-BE49-F238E27FC236}">
-                <a16:creationId xmlns:a16="http://schemas.microsoft.com/office/drawing/2014/main" id="{D96D6FD0-4909-4B1A-BAD9-1902D80E28A6}"/>
+                <a16:creationId xmlns:a16="http://schemas.microsoft.com/office/drawing/2014/main" id="{3BD38C8B-6CE1-4001-A645-1DA384D55D19}"/>
               </a:ext>
             </a:extLst>
           </p:cNvPr>
@@ -3730,7 +3730,7 @@
           <p:cNvPr id="10" name="">
             <a:extLst xmlns:a="http://schemas.openxmlformats.org/drawingml/2006/main">
               <a:ext uri="{FF2B5EF4-FFF2-40B4-BE49-F238E27FC236}">
-                <a16:creationId xmlns:a16="http://schemas.microsoft.com/office/drawing/2014/main" id="{92E2C52A-523C-4BA0-9D3E-95F6ED0C4E04}"/>
+                <a16:creationId xmlns:a16="http://schemas.microsoft.com/office/drawing/2014/main" id="{DB846E94-F12C-4B9D-A4B8-5379877A6540}"/>
               </a:ext>
             </a:extLst>
           </p:cNvPr>
@@ -3787,7 +3787,7 @@
           <p:cNvPr id="11" name="">
             <a:extLst xmlns:a="http://schemas.openxmlformats.org/drawingml/2006/main">
               <a:ext uri="{FF2B5EF4-FFF2-40B4-BE49-F238E27FC236}">
-                <a16:creationId xmlns:a16="http://schemas.microsoft.com/office/drawing/2014/main" id="{CF3191EC-7726-4B4A-B883-CF78210D7BEC}"/>
+                <a16:creationId xmlns:a16="http://schemas.microsoft.com/office/drawing/2014/main" id="{4B44548D-8609-4CA3-9CE6-6C26E2C5949D}"/>
               </a:ext>
             </a:extLst>
           </p:cNvPr>
@@ -3821,7 +3821,7 @@
           <p:cNvPr id="12" name="">
             <a:extLst xmlns:a="http://schemas.openxmlformats.org/drawingml/2006/main">
               <a:ext uri="{FF2B5EF4-FFF2-40B4-BE49-F238E27FC236}">
-                <a16:creationId xmlns:a16="http://schemas.microsoft.com/office/drawing/2014/main" id="{731DD829-8837-4D85-A7A7-E5BB3799EE9F}"/>
+                <a16:creationId xmlns:a16="http://schemas.microsoft.com/office/drawing/2014/main" id="{C35E7DE2-BDE5-42F8-9348-CCBCB4EDB34F}"/>
               </a:ext>
             </a:extLst>
           </p:cNvPr>
@@ -3878,7 +3878,7 @@
           <p:cNvPr id="13" name="">
             <a:extLst xmlns:a="http://schemas.openxmlformats.org/drawingml/2006/main">
               <a:ext uri="{FF2B5EF4-FFF2-40B4-BE49-F238E27FC236}">
-                <a16:creationId xmlns:a16="http://schemas.microsoft.com/office/drawing/2014/main" id="{97410505-3451-4BBA-AEAF-6E4046CF1FC0}"/>
+                <a16:creationId xmlns:a16="http://schemas.microsoft.com/office/drawing/2014/main" id="{FD0FB526-58B3-46B1-AB9A-1B284325F0C7}"/>
               </a:ext>
             </a:extLst>
           </p:cNvPr>
@@ -3935,7 +3935,7 @@
           <p:cNvPr id="14" name="">
             <a:extLst xmlns:a="http://schemas.openxmlformats.org/drawingml/2006/main">
               <a:ext uri="{FF2B5EF4-FFF2-40B4-BE49-F238E27FC236}">
-                <a16:creationId xmlns:a16="http://schemas.microsoft.com/office/drawing/2014/main" id="{D7A5D8B0-AA8B-4A3C-A2A8-FFFB3E5E8608}"/>
+                <a16:creationId xmlns:a16="http://schemas.microsoft.com/office/drawing/2014/main" id="{AFABF405-8D2F-42C8-B59C-25A7DABFFACD}"/>
               </a:ext>
             </a:extLst>
           </p:cNvPr>
@@ -3992,7 +3992,7 @@
           <p:cNvPr id="15" name="">
             <a:extLst xmlns:a="http://schemas.openxmlformats.org/drawingml/2006/main">
               <a:ext uri="{FF2B5EF4-FFF2-40B4-BE49-F238E27FC236}">
-                <a16:creationId xmlns:a16="http://schemas.microsoft.com/office/drawing/2014/main" id="{D99B42AE-F5AF-4A53-8323-1F8CF194AB28}"/>
+                <a16:creationId xmlns:a16="http://schemas.microsoft.com/office/drawing/2014/main" id="{6721F73E-2D72-431D-AAC3-7198B82E64CA}"/>
               </a:ext>
             </a:extLst>
           </p:cNvPr>
@@ -4026,7 +4026,7 @@
           <p:cNvPr id="16" name="">
             <a:extLst xmlns:a="http://schemas.openxmlformats.org/drawingml/2006/main">
               <a:ext uri="{FF2B5EF4-FFF2-40B4-BE49-F238E27FC236}">
-                <a16:creationId xmlns:a16="http://schemas.microsoft.com/office/drawing/2014/main" id="{9474DB5B-89F1-4BD7-9B57-71984EBBBA97}"/>
+                <a16:creationId xmlns:a16="http://schemas.microsoft.com/office/drawing/2014/main" id="{A300C074-2B28-41FC-B010-FF9F5497EE29}"/>
               </a:ext>
             </a:extLst>
           </p:cNvPr>
@@ -4083,7 +4083,7 @@
           <p:cNvPr id="17" name="">
             <a:extLst xmlns:a="http://schemas.openxmlformats.org/drawingml/2006/main">
               <a:ext uri="{FF2B5EF4-FFF2-40B4-BE49-F238E27FC236}">
-                <a16:creationId xmlns:a16="http://schemas.microsoft.com/office/drawing/2014/main" id="{EDC524CE-9B4C-406A-BA77-8D9E4AFDA6B0}"/>
+                <a16:creationId xmlns:a16="http://schemas.microsoft.com/office/drawing/2014/main" id="{7BCCEF3A-88D4-43E3-89C7-7ED9DFE0BEC7}"/>
               </a:ext>
             </a:extLst>
           </p:cNvPr>
@@ -4140,7 +4140,7 @@
           <p:cNvPr id="18" name="">
             <a:extLst xmlns:a="http://schemas.openxmlformats.org/drawingml/2006/main">
               <a:ext uri="{FF2B5EF4-FFF2-40B4-BE49-F238E27FC236}">
-                <a16:creationId xmlns:a16="http://schemas.microsoft.com/office/drawing/2014/main" id="{E10784BC-441D-4ABD-B8F4-8F74C54925EF}"/>
+                <a16:creationId xmlns:a16="http://schemas.microsoft.com/office/drawing/2014/main" id="{38220BED-A5C2-4409-A33B-68E84E284B2C}"/>
               </a:ext>
             </a:extLst>
           </p:cNvPr>
@@ -4195,7 +4195,7 @@
     </p:spTree>
     <p:extLst>
       <p:ext uri="{BB962C8B-B14F-4D97-AF65-F5344CB8AC3E}">
-        <p14:creationId xmlns:p14="http://schemas.microsoft.com/office/powerpoint/2010/main" val="1562212179"/>
+        <p14:creationId xmlns:p14="http://schemas.microsoft.com/office/powerpoint/2010/main" val="2079084136"/>
       </p:ext>
     </p:extLst>
   </p:cSld>
@@ -4350,7 +4350,7 @@
           <p:cNvPr id="23" name="">
             <a:extLst xmlns:a="http://schemas.openxmlformats.org/drawingml/2006/main">
               <a:ext uri="{FF2B5EF4-FFF2-40B4-BE49-F238E27FC236}">
-                <a16:creationId xmlns:a16="http://schemas.microsoft.com/office/drawing/2014/main" id="{5D6808A4-EB22-4AA0-B6CD-D407619FCF33}"/>
+                <a16:creationId xmlns:a16="http://schemas.microsoft.com/office/drawing/2014/main" id="{624C1CB0-BF87-4FD5-B4C1-8C938C383D9D}"/>
               </a:ext>
             </a:extLst>
           </p:cNvPr>
@@ -4382,7 +4382,7 @@
           <p:cNvPr id="2" name="">
             <a:extLst xmlns:a="http://schemas.openxmlformats.org/drawingml/2006/main">
               <a:ext uri="{FF2B5EF4-FFF2-40B4-BE49-F238E27FC236}">
-                <a16:creationId xmlns:a16="http://schemas.microsoft.com/office/drawing/2014/main" id="{76949835-DFFD-44F3-8DC2-538688844953}"/>
+                <a16:creationId xmlns:a16="http://schemas.microsoft.com/office/drawing/2014/main" id="{39EF0532-68A7-438B-92D4-B5AF90D3947B}"/>
               </a:ext>
             </a:extLst>
           </p:cNvPr>
@@ -4439,7 +4439,7 @@
           <p:cNvPr id="3" name="">
             <a:extLst xmlns:a="http://schemas.openxmlformats.org/drawingml/2006/main">
               <a:ext uri="{FF2B5EF4-FFF2-40B4-BE49-F238E27FC236}">
-                <a16:creationId xmlns:a16="http://schemas.microsoft.com/office/drawing/2014/main" id="{2D7FEE79-F479-4AE2-8819-AB69DEE01080}"/>
+                <a16:creationId xmlns:a16="http://schemas.microsoft.com/office/drawing/2014/main" id="{F5DCD677-D68F-441E-804F-9CA8A18B5B9A}"/>
               </a:ext>
             </a:extLst>
           </p:cNvPr>
@@ -4471,7 +4471,7 @@
           <p:cNvPr id="4" name="">
             <a:extLst xmlns:a="http://schemas.openxmlformats.org/drawingml/2006/main">
               <a:ext uri="{FF2B5EF4-FFF2-40B4-BE49-F238E27FC236}">
-                <a16:creationId xmlns:a16="http://schemas.microsoft.com/office/drawing/2014/main" id="{3B226DAA-DC5F-470E-BF6D-B27F06D4B9C4}"/>
+                <a16:creationId xmlns:a16="http://schemas.microsoft.com/office/drawing/2014/main" id="{3B6C8436-017A-4D0C-9408-D2BD13AD2784}"/>
               </a:ext>
             </a:extLst>
           </p:cNvPr>
@@ -4528,7 +4528,7 @@
           <p:cNvPr id="5" name="">
             <a:extLst xmlns:a="http://schemas.openxmlformats.org/drawingml/2006/main">
               <a:ext uri="{FF2B5EF4-FFF2-40B4-BE49-F238E27FC236}">
-                <a16:creationId xmlns:a16="http://schemas.microsoft.com/office/drawing/2014/main" id="{933A5BA0-8C50-4AF3-9A58-D8940DE18A97}"/>
+                <a16:creationId xmlns:a16="http://schemas.microsoft.com/office/drawing/2014/main" id="{EC8A3C36-2286-4A94-A10B-3F433B98CB56}"/>
               </a:ext>
             </a:extLst>
           </p:cNvPr>
@@ -4585,7 +4585,7 @@
           <p:cNvPr id="6" name="">
             <a:extLst xmlns:a="http://schemas.openxmlformats.org/drawingml/2006/main">
               <a:ext uri="{FF2B5EF4-FFF2-40B4-BE49-F238E27FC236}">
-                <a16:creationId xmlns:a16="http://schemas.microsoft.com/office/drawing/2014/main" id="{744111EF-1399-4AC7-8C1E-C9CD5597F46D}"/>
+                <a16:creationId xmlns:a16="http://schemas.microsoft.com/office/drawing/2014/main" id="{08BE7594-F25F-4E1F-B37E-07F1F3DD828C}"/>
               </a:ext>
             </a:extLst>
           </p:cNvPr>
@@ -4642,7 +4642,7 @@
           <p:cNvPr id="7" name="">
             <a:extLst xmlns:a="http://schemas.openxmlformats.org/drawingml/2006/main">
               <a:ext uri="{FF2B5EF4-FFF2-40B4-BE49-F238E27FC236}">
-                <a16:creationId xmlns:a16="http://schemas.microsoft.com/office/drawing/2014/main" id="{3B9C1045-8F9A-4387-82D5-C2D5426FC66E}"/>
+                <a16:creationId xmlns:a16="http://schemas.microsoft.com/office/drawing/2014/main" id="{207CA1C5-5CEB-4B92-9F3E-17007A0F6AC7}"/>
               </a:ext>
             </a:extLst>
           </p:cNvPr>
@@ -4674,7 +4674,7 @@
           <p:cNvPr id="8" name="">
             <a:extLst xmlns:a="http://schemas.openxmlformats.org/drawingml/2006/main">
               <a:ext uri="{FF2B5EF4-FFF2-40B4-BE49-F238E27FC236}">
-                <a16:creationId xmlns:a16="http://schemas.microsoft.com/office/drawing/2014/main" id="{A9732879-8B56-40BA-B23C-479A2CCB5102}"/>
+                <a16:creationId xmlns:a16="http://schemas.microsoft.com/office/drawing/2014/main" id="{E9FD37CB-EF03-477E-9688-92540E8B3966}"/>
               </a:ext>
             </a:extLst>
           </p:cNvPr>
@@ -4731,7 +4731,7 @@
           <p:cNvPr id="9" name="">
             <a:extLst xmlns:a="http://schemas.openxmlformats.org/drawingml/2006/main">
               <a:ext uri="{FF2B5EF4-FFF2-40B4-BE49-F238E27FC236}">
-                <a16:creationId xmlns:a16="http://schemas.microsoft.com/office/drawing/2014/main" id="{C4488134-7A30-456D-9ED4-C92D6B58DCAA}"/>
+                <a16:creationId xmlns:a16="http://schemas.microsoft.com/office/drawing/2014/main" id="{E1C99280-BBF9-472B-BAA6-6572BAA3E191}"/>
               </a:ext>
             </a:extLst>
           </p:cNvPr>
@@ -4788,7 +4788,7 @@
           <p:cNvPr id="10" name="">
             <a:extLst xmlns:a="http://schemas.openxmlformats.org/drawingml/2006/main">
               <a:ext uri="{FF2B5EF4-FFF2-40B4-BE49-F238E27FC236}">
-                <a16:creationId xmlns:a16="http://schemas.microsoft.com/office/drawing/2014/main" id="{FE1DB977-EF47-4214-B87B-D626C54FDDCB}"/>
+                <a16:creationId xmlns:a16="http://schemas.microsoft.com/office/drawing/2014/main" id="{56A1EA97-F996-491B-84FE-3990B24EC4F8}"/>
               </a:ext>
             </a:extLst>
           </p:cNvPr>
@@ -4822,7 +4822,7 @@
           <p:cNvPr id="11" name="">
             <a:extLst xmlns:a="http://schemas.openxmlformats.org/drawingml/2006/main">
               <a:ext uri="{FF2B5EF4-FFF2-40B4-BE49-F238E27FC236}">
-                <a16:creationId xmlns:a16="http://schemas.microsoft.com/office/drawing/2014/main" id="{F730DD3A-0BC5-46F9-8160-3025D6FC9A0C}"/>
+                <a16:creationId xmlns:a16="http://schemas.microsoft.com/office/drawing/2014/main" id="{5FE8A0A2-186B-461F-BAEB-9BB36A79255F}"/>
               </a:ext>
             </a:extLst>
           </p:cNvPr>
@@ -4854,7 +4854,7 @@
           <p:cNvPr id="12" name="">
             <a:extLst xmlns:a="http://schemas.openxmlformats.org/drawingml/2006/main">
               <a:ext uri="{FF2B5EF4-FFF2-40B4-BE49-F238E27FC236}">
-                <a16:creationId xmlns:a16="http://schemas.microsoft.com/office/drawing/2014/main" id="{1117C8C6-89D9-4915-A02C-534937F87408}"/>
+                <a16:creationId xmlns:a16="http://schemas.microsoft.com/office/drawing/2014/main" id="{5837A4BC-ED5E-4367-BC7F-B2522A2B9FBE}"/>
               </a:ext>
             </a:extLst>
           </p:cNvPr>
@@ -4911,7 +4911,7 @@
           <p:cNvPr id="13" name="">
             <a:extLst xmlns:a="http://schemas.openxmlformats.org/drawingml/2006/main">
               <a:ext uri="{FF2B5EF4-FFF2-40B4-BE49-F238E27FC236}">
-                <a16:creationId xmlns:a16="http://schemas.microsoft.com/office/drawing/2014/main" id="{51F31031-7DA5-477A-8A07-8712076D5F01}"/>
+                <a16:creationId xmlns:a16="http://schemas.microsoft.com/office/drawing/2014/main" id="{0FCA5C7D-80A4-41E6-A636-28AD333E036A}"/>
               </a:ext>
             </a:extLst>
           </p:cNvPr>
@@ -4968,7 +4968,7 @@
           <p:cNvPr id="14" name="">
             <a:extLst xmlns:a="http://schemas.openxmlformats.org/drawingml/2006/main">
               <a:ext uri="{FF2B5EF4-FFF2-40B4-BE49-F238E27FC236}">
-                <a16:creationId xmlns:a16="http://schemas.microsoft.com/office/drawing/2014/main" id="{1E10DE96-AF6F-402A-BE92-615615B95F4A}"/>
+                <a16:creationId xmlns:a16="http://schemas.microsoft.com/office/drawing/2014/main" id="{EC3FC6A2-D4F2-43F4-8DB2-D4418E800777}"/>
               </a:ext>
             </a:extLst>
           </p:cNvPr>
@@ -5002,7 +5002,7 @@
           <p:cNvPr id="15" name="">
             <a:extLst xmlns:a="http://schemas.openxmlformats.org/drawingml/2006/main">
               <a:ext uri="{FF2B5EF4-FFF2-40B4-BE49-F238E27FC236}">
-                <a16:creationId xmlns:a16="http://schemas.microsoft.com/office/drawing/2014/main" id="{0511C4F9-7204-4832-9211-2CC598DEC61E}"/>
+                <a16:creationId xmlns:a16="http://schemas.microsoft.com/office/drawing/2014/main" id="{D1B6F738-86CC-4D2F-B8BC-1B1680CCF37F}"/>
               </a:ext>
             </a:extLst>
           </p:cNvPr>
@@ -5034,7 +5034,7 @@
           <p:cNvPr id="16" name="">
             <a:extLst xmlns:a="http://schemas.openxmlformats.org/drawingml/2006/main">
               <a:ext uri="{FF2B5EF4-FFF2-40B4-BE49-F238E27FC236}">
-                <a16:creationId xmlns:a16="http://schemas.microsoft.com/office/drawing/2014/main" id="{D299C13E-FCC6-4CD2-A51E-804B7061910E}"/>
+                <a16:creationId xmlns:a16="http://schemas.microsoft.com/office/drawing/2014/main" id="{B38A4F0A-B248-4CA5-BFAA-6F3EF798B192}"/>
               </a:ext>
             </a:extLst>
           </p:cNvPr>
@@ -5091,7 +5091,7 @@
           <p:cNvPr id="17" name="">
             <a:extLst xmlns:a="http://schemas.openxmlformats.org/drawingml/2006/main">
               <a:ext uri="{FF2B5EF4-FFF2-40B4-BE49-F238E27FC236}">
-                <a16:creationId xmlns:a16="http://schemas.microsoft.com/office/drawing/2014/main" id="{B7273CCE-DAC8-4CB8-AF61-BA1DF165D7C8}"/>
+                <a16:creationId xmlns:a16="http://schemas.microsoft.com/office/drawing/2014/main" id="{3ACF9020-9165-43D3-A7A9-358D87029EBC}"/>
               </a:ext>
             </a:extLst>
           </p:cNvPr>
@@ -5148,7 +5148,7 @@
           <p:cNvPr id="18" name="">
             <a:extLst xmlns:a="http://schemas.openxmlformats.org/drawingml/2006/main">
               <a:ext uri="{FF2B5EF4-FFF2-40B4-BE49-F238E27FC236}">
-                <a16:creationId xmlns:a16="http://schemas.microsoft.com/office/drawing/2014/main" id="{91C07D8F-8DEB-4F3E-A418-B4A1A5DB43CA}"/>
+                <a16:creationId xmlns:a16="http://schemas.microsoft.com/office/drawing/2014/main" id="{BD2D6207-955E-40BC-BA9A-0A04D73F2088}"/>
               </a:ext>
             </a:extLst>
           </p:cNvPr>
@@ -5182,7 +5182,7 @@
           <p:cNvPr id="19" name="">
             <a:extLst xmlns:a="http://schemas.openxmlformats.org/drawingml/2006/main">
               <a:ext uri="{FF2B5EF4-FFF2-40B4-BE49-F238E27FC236}">
-                <a16:creationId xmlns:a16="http://schemas.microsoft.com/office/drawing/2014/main" id="{982EDC38-6F76-4DD0-9678-1F5BC908412D}"/>
+                <a16:creationId xmlns:a16="http://schemas.microsoft.com/office/drawing/2014/main" id="{FFC8A2B5-CD10-4B4D-AAD2-E3B56293A867}"/>
               </a:ext>
             </a:extLst>
           </p:cNvPr>
@@ -5214,7 +5214,7 @@
           <p:cNvPr id="20" name="">
             <a:extLst xmlns:a="http://schemas.openxmlformats.org/drawingml/2006/main">
               <a:ext uri="{FF2B5EF4-FFF2-40B4-BE49-F238E27FC236}">
-                <a16:creationId xmlns:a16="http://schemas.microsoft.com/office/drawing/2014/main" id="{2D4E54E6-DFB7-4E9B-81AF-2B25ED748DD7}"/>
+                <a16:creationId xmlns:a16="http://schemas.microsoft.com/office/drawing/2014/main" id="{D5682307-2578-4A25-917E-1AC6485FC7AC}"/>
               </a:ext>
             </a:extLst>
           </p:cNvPr>
@@ -5271,7 +5271,7 @@
           <p:cNvPr id="21" name="">
             <a:extLst xmlns:a="http://schemas.openxmlformats.org/drawingml/2006/main">
               <a:ext uri="{FF2B5EF4-FFF2-40B4-BE49-F238E27FC236}">
-                <a16:creationId xmlns:a16="http://schemas.microsoft.com/office/drawing/2014/main" id="{887A591F-3BEB-44EE-9249-7D02E9010C3F}"/>
+                <a16:creationId xmlns:a16="http://schemas.microsoft.com/office/drawing/2014/main" id="{658A26CF-0A87-4B76-AD06-C5F016DB3E16}"/>
               </a:ext>
             </a:extLst>
           </p:cNvPr>
@@ -5328,7 +5328,7 @@
           <p:cNvPr id="22" name="">
             <a:extLst xmlns:a="http://schemas.openxmlformats.org/drawingml/2006/main">
               <a:ext uri="{FF2B5EF4-FFF2-40B4-BE49-F238E27FC236}">
-                <a16:creationId xmlns:a16="http://schemas.microsoft.com/office/drawing/2014/main" id="{A2AF72C7-AA5B-4D1B-B618-C61FBCC432A6}"/>
+                <a16:creationId xmlns:a16="http://schemas.microsoft.com/office/drawing/2014/main" id="{281476A8-080B-48FD-A2BD-645385ED6391}"/>
               </a:ext>
             </a:extLst>
           </p:cNvPr>
@@ -5383,7 +5383,7 @@
     </p:spTree>
     <p:extLst>
       <p:ext uri="{BB962C8B-B14F-4D97-AF65-F5344CB8AC3E}">
-        <p14:creationId xmlns:p14="http://schemas.microsoft.com/office/powerpoint/2010/main" val="674100033"/>
+        <p14:creationId xmlns:p14="http://schemas.microsoft.com/office/powerpoint/2010/main" val="136274325"/>
       </p:ext>
     </p:extLst>
   </p:cSld>
@@ -5584,7 +5584,7 @@
           <p:cNvPr id="23" name="">
             <a:extLst xmlns:a="http://schemas.openxmlformats.org/drawingml/2006/main">
               <a:ext uri="{FF2B5EF4-FFF2-40B4-BE49-F238E27FC236}">
-                <a16:creationId xmlns:a16="http://schemas.microsoft.com/office/drawing/2014/main" id="{AB3481E4-5E7E-4361-8464-FD737707EC77}"/>
+                <a16:creationId xmlns:a16="http://schemas.microsoft.com/office/drawing/2014/main" id="{3BD579A0-3B4F-4D11-A460-C82782195F8C}"/>
               </a:ext>
             </a:extLst>
           </p:cNvPr>
@@ -5616,7 +5616,7 @@
           <p:cNvPr id="2" name="">
             <a:extLst xmlns:a="http://schemas.openxmlformats.org/drawingml/2006/main">
               <a:ext uri="{FF2B5EF4-FFF2-40B4-BE49-F238E27FC236}">
-                <a16:creationId xmlns:a16="http://schemas.microsoft.com/office/drawing/2014/main" id="{CC625841-CFCB-48A0-A9CC-47E29FBB1BB7}"/>
+                <a16:creationId xmlns:a16="http://schemas.microsoft.com/office/drawing/2014/main" id="{4D6C3086-3769-40E9-8FD9-157ECCBE44BA}"/>
               </a:ext>
             </a:extLst>
           </p:cNvPr>
@@ -5673,7 +5673,7 @@
           <p:cNvPr id="3" name="">
             <a:extLst xmlns:a="http://schemas.openxmlformats.org/drawingml/2006/main">
               <a:ext uri="{FF2B5EF4-FFF2-40B4-BE49-F238E27FC236}">
-                <a16:creationId xmlns:a16="http://schemas.microsoft.com/office/drawing/2014/main" id="{11EB867D-9668-4090-A519-859578F94E71}"/>
+                <a16:creationId xmlns:a16="http://schemas.microsoft.com/office/drawing/2014/main" id="{0D21079D-19DF-4DBB-8DA6-5236494682F1}"/>
               </a:ext>
             </a:extLst>
           </p:cNvPr>
@@ -5705,7 +5705,7 @@
           <p:cNvPr id="4" name="">
             <a:extLst xmlns:a="http://schemas.openxmlformats.org/drawingml/2006/main">
               <a:ext uri="{FF2B5EF4-FFF2-40B4-BE49-F238E27FC236}">
-                <a16:creationId xmlns:a16="http://schemas.microsoft.com/office/drawing/2014/main" id="{A2E84C49-7AB6-4353-9312-D8F5987466D7}"/>
+                <a16:creationId xmlns:a16="http://schemas.microsoft.com/office/drawing/2014/main" id="{19942D97-4FE4-4E2E-971C-4967D3089008}"/>
               </a:ext>
             </a:extLst>
           </p:cNvPr>
@@ -5762,7 +5762,7 @@
           <p:cNvPr id="5" name="">
             <a:extLst xmlns:a="http://schemas.openxmlformats.org/drawingml/2006/main">
               <a:ext uri="{FF2B5EF4-FFF2-40B4-BE49-F238E27FC236}">
-                <a16:creationId xmlns:a16="http://schemas.microsoft.com/office/drawing/2014/main" id="{6FC6435C-17CD-4C69-A578-344D40E79A92}"/>
+                <a16:creationId xmlns:a16="http://schemas.microsoft.com/office/drawing/2014/main" id="{75749AF7-C8CA-4B61-AFB7-75E16E6F3749}"/>
               </a:ext>
             </a:extLst>
           </p:cNvPr>
@@ -5819,7 +5819,7 @@
           <p:cNvPr id="6" name="">
             <a:extLst xmlns:a="http://schemas.openxmlformats.org/drawingml/2006/main">
               <a:ext uri="{FF2B5EF4-FFF2-40B4-BE49-F238E27FC236}">
-                <a16:creationId xmlns:a16="http://schemas.microsoft.com/office/drawing/2014/main" id="{FBEC82B2-BD27-43E3-B2AA-DE32D458325B}"/>
+                <a16:creationId xmlns:a16="http://schemas.microsoft.com/office/drawing/2014/main" id="{85874498-7152-4AFE-A98E-CAD583DC38AD}"/>
               </a:ext>
             </a:extLst>
           </p:cNvPr>
@@ -5876,7 +5876,7 @@
           <p:cNvPr id="7" name="">
             <a:extLst xmlns:a="http://schemas.openxmlformats.org/drawingml/2006/main">
               <a:ext uri="{FF2B5EF4-FFF2-40B4-BE49-F238E27FC236}">
-                <a16:creationId xmlns:a16="http://schemas.microsoft.com/office/drawing/2014/main" id="{9600F829-A109-4431-82E8-694E89B4437C}"/>
+                <a16:creationId xmlns:a16="http://schemas.microsoft.com/office/drawing/2014/main" id="{4220A349-CBC7-4CFB-A5AF-A5FD48400861}"/>
               </a:ext>
             </a:extLst>
           </p:cNvPr>
@@ -5908,7 +5908,7 @@
           <p:cNvPr id="8" name="">
             <a:extLst xmlns:a="http://schemas.openxmlformats.org/drawingml/2006/main">
               <a:ext uri="{FF2B5EF4-FFF2-40B4-BE49-F238E27FC236}">
-                <a16:creationId xmlns:a16="http://schemas.microsoft.com/office/drawing/2014/main" id="{FE197A8E-2188-409E-825F-76040F262A67}"/>
+                <a16:creationId xmlns:a16="http://schemas.microsoft.com/office/drawing/2014/main" id="{0BF79B61-06D5-4992-B83A-8A628AFA06C4}"/>
               </a:ext>
             </a:extLst>
           </p:cNvPr>
@@ -5965,7 +5965,7 @@
           <p:cNvPr id="9" name="">
             <a:extLst xmlns:a="http://schemas.openxmlformats.org/drawingml/2006/main">
               <a:ext uri="{FF2B5EF4-FFF2-40B4-BE49-F238E27FC236}">
-                <a16:creationId xmlns:a16="http://schemas.microsoft.com/office/drawing/2014/main" id="{37004720-3957-418A-8F5A-9F2F38654DCD}"/>
+                <a16:creationId xmlns:a16="http://schemas.microsoft.com/office/drawing/2014/main" id="{F360A041-F427-4446-8D05-58C70E51EE91}"/>
               </a:ext>
             </a:extLst>
           </p:cNvPr>
@@ -6022,7 +6022,7 @@
           <p:cNvPr id="10" name="">
             <a:extLst xmlns:a="http://schemas.openxmlformats.org/drawingml/2006/main">
               <a:ext uri="{FF2B5EF4-FFF2-40B4-BE49-F238E27FC236}">
-                <a16:creationId xmlns:a16="http://schemas.microsoft.com/office/drawing/2014/main" id="{953ADEF0-303C-4C46-81B2-25A3379E126A}"/>
+                <a16:creationId xmlns:a16="http://schemas.microsoft.com/office/drawing/2014/main" id="{CE7CCC81-DA37-4FAB-BCC6-CE2653892B5A}"/>
               </a:ext>
             </a:extLst>
           </p:cNvPr>
@@ -6056,7 +6056,7 @@
           <p:cNvPr id="11" name="">
             <a:extLst xmlns:a="http://schemas.openxmlformats.org/drawingml/2006/main">
               <a:ext uri="{FF2B5EF4-FFF2-40B4-BE49-F238E27FC236}">
-                <a16:creationId xmlns:a16="http://schemas.microsoft.com/office/drawing/2014/main" id="{CD7EE7E0-0D96-427C-9577-6A4522DBC26F}"/>
+                <a16:creationId xmlns:a16="http://schemas.microsoft.com/office/drawing/2014/main" id="{B593D469-E046-4377-8C5B-83F252D810B8}"/>
               </a:ext>
             </a:extLst>
           </p:cNvPr>
@@ -6088,7 +6088,7 @@
           <p:cNvPr id="12" name="">
             <a:extLst xmlns:a="http://schemas.openxmlformats.org/drawingml/2006/main">
               <a:ext uri="{FF2B5EF4-FFF2-40B4-BE49-F238E27FC236}">
-                <a16:creationId xmlns:a16="http://schemas.microsoft.com/office/drawing/2014/main" id="{8B345FAD-BD2F-41FC-BFDE-AAD31A228984}"/>
+                <a16:creationId xmlns:a16="http://schemas.microsoft.com/office/drawing/2014/main" id="{45043B67-7B2A-4856-9CB7-2AB943CBE56A}"/>
               </a:ext>
             </a:extLst>
           </p:cNvPr>
@@ -6145,7 +6145,7 @@
           <p:cNvPr id="13" name="">
             <a:extLst xmlns:a="http://schemas.openxmlformats.org/drawingml/2006/main">
               <a:ext uri="{FF2B5EF4-FFF2-40B4-BE49-F238E27FC236}">
-                <a16:creationId xmlns:a16="http://schemas.microsoft.com/office/drawing/2014/main" id="{1DAF8566-A8C0-44C4-9EB5-2810D434683A}"/>
+                <a16:creationId xmlns:a16="http://schemas.microsoft.com/office/drawing/2014/main" id="{0CA14C5D-D974-4290-9A91-C0A6D861FB8C}"/>
               </a:ext>
             </a:extLst>
           </p:cNvPr>
@@ -6202,7 +6202,7 @@
           <p:cNvPr id="14" name="">
             <a:extLst xmlns:a="http://schemas.openxmlformats.org/drawingml/2006/main">
               <a:ext uri="{FF2B5EF4-FFF2-40B4-BE49-F238E27FC236}">
-                <a16:creationId xmlns:a16="http://schemas.microsoft.com/office/drawing/2014/main" id="{59B221A4-367D-45FA-8941-AD962D7BE93F}"/>
+                <a16:creationId xmlns:a16="http://schemas.microsoft.com/office/drawing/2014/main" id="{0D1EEBF9-8697-4831-8A7E-DAFC13717572}"/>
               </a:ext>
             </a:extLst>
           </p:cNvPr>
@@ -6236,7 +6236,7 @@
           <p:cNvPr id="15" name="">
             <a:extLst xmlns:a="http://schemas.openxmlformats.org/drawingml/2006/main">
               <a:ext uri="{FF2B5EF4-FFF2-40B4-BE49-F238E27FC236}">
-                <a16:creationId xmlns:a16="http://schemas.microsoft.com/office/drawing/2014/main" id="{899425D9-C7E6-4879-9A04-23886C46AC55}"/>
+                <a16:creationId xmlns:a16="http://schemas.microsoft.com/office/drawing/2014/main" id="{2360A21D-2332-4E6C-89F9-E66940BF43E6}"/>
               </a:ext>
             </a:extLst>
           </p:cNvPr>
@@ -6268,7 +6268,7 @@
           <p:cNvPr id="16" name="">
             <a:extLst xmlns:a="http://schemas.openxmlformats.org/drawingml/2006/main">
               <a:ext uri="{FF2B5EF4-FFF2-40B4-BE49-F238E27FC236}">
-                <a16:creationId xmlns:a16="http://schemas.microsoft.com/office/drawing/2014/main" id="{F2A3A32E-3693-4ECA-94A7-B37847693895}"/>
+                <a16:creationId xmlns:a16="http://schemas.microsoft.com/office/drawing/2014/main" id="{4A29895B-C226-45C1-BF79-AC4430682A09}"/>
               </a:ext>
             </a:extLst>
           </p:cNvPr>
@@ -6325,7 +6325,7 @@
           <p:cNvPr id="17" name="">
             <a:extLst xmlns:a="http://schemas.openxmlformats.org/drawingml/2006/main">
               <a:ext uri="{FF2B5EF4-FFF2-40B4-BE49-F238E27FC236}">
-                <a16:creationId xmlns:a16="http://schemas.microsoft.com/office/drawing/2014/main" id="{94947603-C3D2-4F98-933C-F7F63E36FB9B}"/>
+                <a16:creationId xmlns:a16="http://schemas.microsoft.com/office/drawing/2014/main" id="{59845827-FC2E-4A00-864D-A256EA45F53D}"/>
               </a:ext>
             </a:extLst>
           </p:cNvPr>
@@ -6382,7 +6382,7 @@
           <p:cNvPr id="18" name="">
             <a:extLst xmlns:a="http://schemas.openxmlformats.org/drawingml/2006/main">
               <a:ext uri="{FF2B5EF4-FFF2-40B4-BE49-F238E27FC236}">
-                <a16:creationId xmlns:a16="http://schemas.microsoft.com/office/drawing/2014/main" id="{A4D5C5AC-BA67-46C7-A885-665000333AA3}"/>
+                <a16:creationId xmlns:a16="http://schemas.microsoft.com/office/drawing/2014/main" id="{437ADA62-18C2-4023-B9A2-C8838BF36D8E}"/>
               </a:ext>
             </a:extLst>
           </p:cNvPr>
@@ -6416,7 +6416,7 @@
           <p:cNvPr id="19" name="">
             <a:extLst xmlns:a="http://schemas.openxmlformats.org/drawingml/2006/main">
               <a:ext uri="{FF2B5EF4-FFF2-40B4-BE49-F238E27FC236}">
-                <a16:creationId xmlns:a16="http://schemas.microsoft.com/office/drawing/2014/main" id="{68EE3E28-462C-48F2-BFF0-451BE42CF8FE}"/>
+                <a16:creationId xmlns:a16="http://schemas.microsoft.com/office/drawing/2014/main" id="{8D8C0473-6734-4B3F-9ACF-B77C5AE374F8}"/>
               </a:ext>
             </a:extLst>
           </p:cNvPr>
@@ -6448,7 +6448,7 @@
           <p:cNvPr id="20" name="">
             <a:extLst xmlns:a="http://schemas.openxmlformats.org/drawingml/2006/main">
               <a:ext uri="{FF2B5EF4-FFF2-40B4-BE49-F238E27FC236}">
-                <a16:creationId xmlns:a16="http://schemas.microsoft.com/office/drawing/2014/main" id="{96B2191F-5115-4AE8-8A09-D925998B2793}"/>
+                <a16:creationId xmlns:a16="http://schemas.microsoft.com/office/drawing/2014/main" id="{C7F4F2AB-BE49-4493-8E31-D5E60BC4BDFF}"/>
               </a:ext>
             </a:extLst>
           </p:cNvPr>
@@ -6505,7 +6505,7 @@
           <p:cNvPr id="21" name="">
             <a:extLst xmlns:a="http://schemas.openxmlformats.org/drawingml/2006/main">
               <a:ext uri="{FF2B5EF4-FFF2-40B4-BE49-F238E27FC236}">
-                <a16:creationId xmlns:a16="http://schemas.microsoft.com/office/drawing/2014/main" id="{EC72F883-E396-4131-BC81-FB73512DCAF0}"/>
+                <a16:creationId xmlns:a16="http://schemas.microsoft.com/office/drawing/2014/main" id="{9E97EA0A-363E-4979-9F16-C1D46400D9AA}"/>
               </a:ext>
             </a:extLst>
           </p:cNvPr>
@@ -6562,7 +6562,7 @@
           <p:cNvPr id="22" name="">
             <a:extLst xmlns:a="http://schemas.openxmlformats.org/drawingml/2006/main">
               <a:ext uri="{FF2B5EF4-FFF2-40B4-BE49-F238E27FC236}">
-                <a16:creationId xmlns:a16="http://schemas.microsoft.com/office/drawing/2014/main" id="{FC6E64BA-F555-4C89-A986-EEFE49D5B2C7}"/>
+                <a16:creationId xmlns:a16="http://schemas.microsoft.com/office/drawing/2014/main" id="{DFFC28CF-70B1-40CF-8CD2-424EA8CB4BEE}"/>
               </a:ext>
             </a:extLst>
           </p:cNvPr>
@@ -6617,7 +6617,7 @@
     </p:spTree>
     <p:extLst>
       <p:ext uri="{BB962C8B-B14F-4D97-AF65-F5344CB8AC3E}">
-        <p14:creationId xmlns:p14="http://schemas.microsoft.com/office/powerpoint/2010/main" val="1477833296"/>
+        <p14:creationId xmlns:p14="http://schemas.microsoft.com/office/powerpoint/2010/main" val="122263820"/>
       </p:ext>
     </p:extLst>
   </p:cSld>
@@ -6818,7 +6818,7 @@
           <p:cNvPr id="16" name="">
             <a:extLst xmlns:a="http://schemas.openxmlformats.org/drawingml/2006/main">
               <a:ext uri="{FF2B5EF4-FFF2-40B4-BE49-F238E27FC236}">
-                <a16:creationId xmlns:a16="http://schemas.microsoft.com/office/drawing/2014/main" id="{09BE0A73-F5A7-45B4-B73E-70142A4902BF}"/>
+                <a16:creationId xmlns:a16="http://schemas.microsoft.com/office/drawing/2014/main" id="{CB06EEC3-3185-426C-8EBB-8461013B0E3C}"/>
               </a:ext>
             </a:extLst>
           </p:cNvPr>
@@ -6850,7 +6850,7 @@
           <p:cNvPr id="2" name="">
             <a:extLst xmlns:a="http://schemas.openxmlformats.org/drawingml/2006/main">
               <a:ext uri="{FF2B5EF4-FFF2-40B4-BE49-F238E27FC236}">
-                <a16:creationId xmlns:a16="http://schemas.microsoft.com/office/drawing/2014/main" id="{13C2811E-13AC-4247-9638-AA4119053A92}"/>
+                <a16:creationId xmlns:a16="http://schemas.microsoft.com/office/drawing/2014/main" id="{46C439A3-2D19-4495-89C4-78BF89405317}"/>
               </a:ext>
             </a:extLst>
           </p:cNvPr>
@@ -6907,7 +6907,7 @@
           <p:cNvPr id="3" name="">
             <a:extLst xmlns:a="http://schemas.openxmlformats.org/drawingml/2006/main">
               <a:ext uri="{FF2B5EF4-FFF2-40B4-BE49-F238E27FC236}">
-                <a16:creationId xmlns:a16="http://schemas.microsoft.com/office/drawing/2014/main" id="{4F0805E4-5613-4640-B54D-5AF07A8849F1}"/>
+                <a16:creationId xmlns:a16="http://schemas.microsoft.com/office/drawing/2014/main" id="{A558EED8-E4AA-4124-8241-5B24FFA245D4}"/>
               </a:ext>
             </a:extLst>
           </p:cNvPr>
@@ -6939,7 +6939,7 @@
           <p:cNvPr id="4" name="">
             <a:extLst xmlns:a="http://schemas.openxmlformats.org/drawingml/2006/main">
               <a:ext uri="{FF2B5EF4-FFF2-40B4-BE49-F238E27FC236}">
-                <a16:creationId xmlns:a16="http://schemas.microsoft.com/office/drawing/2014/main" id="{0B7468B0-5A6C-4740-9382-0ACA2EEC1FAF}"/>
+                <a16:creationId xmlns:a16="http://schemas.microsoft.com/office/drawing/2014/main" id="{F3B6A775-8108-445D-A822-F6E87748901D}"/>
               </a:ext>
             </a:extLst>
           </p:cNvPr>
@@ -6996,7 +6996,7 @@
           <p:cNvPr id="5" name="">
             <a:extLst xmlns:a="http://schemas.openxmlformats.org/drawingml/2006/main">
               <a:ext uri="{FF2B5EF4-FFF2-40B4-BE49-F238E27FC236}">
-                <a16:creationId xmlns:a16="http://schemas.microsoft.com/office/drawing/2014/main" id="{3B44FD69-3C6B-4532-8301-2C29971FD7C8}"/>
+                <a16:creationId xmlns:a16="http://schemas.microsoft.com/office/drawing/2014/main" id="{25679D13-5EB8-4A75-A312-F11A1966F170}"/>
               </a:ext>
             </a:extLst>
           </p:cNvPr>
@@ -7053,7 +7053,7 @@
           <p:cNvPr id="6" name="">
             <a:extLst xmlns:a="http://schemas.openxmlformats.org/drawingml/2006/main">
               <a:ext uri="{FF2B5EF4-FFF2-40B4-BE49-F238E27FC236}">
-                <a16:creationId xmlns:a16="http://schemas.microsoft.com/office/drawing/2014/main" id="{ACD9ADF7-89B3-4C2E-9855-6A2586ECDD4F}"/>
+                <a16:creationId xmlns:a16="http://schemas.microsoft.com/office/drawing/2014/main" id="{D094F7A9-A375-4E62-92F2-5DE2828E4CB8}"/>
               </a:ext>
             </a:extLst>
           </p:cNvPr>
@@ -7110,7 +7110,7 @@
           <p:cNvPr id="7" name="">
             <a:extLst xmlns:a="http://schemas.openxmlformats.org/drawingml/2006/main">
               <a:ext uri="{FF2B5EF4-FFF2-40B4-BE49-F238E27FC236}">
-                <a16:creationId xmlns:a16="http://schemas.microsoft.com/office/drawing/2014/main" id="{8AA432F4-E44C-48D5-BF26-0990162BC1DA}"/>
+                <a16:creationId xmlns:a16="http://schemas.microsoft.com/office/drawing/2014/main" id="{EEC844D8-9E91-46A7-A949-75537AE9080B}"/>
               </a:ext>
             </a:extLst>
           </p:cNvPr>
@@ -7142,7 +7142,7 @@
           <p:cNvPr id="8" name="">
             <a:extLst xmlns:a="http://schemas.openxmlformats.org/drawingml/2006/main">
               <a:ext uri="{FF2B5EF4-FFF2-40B4-BE49-F238E27FC236}">
-                <a16:creationId xmlns:a16="http://schemas.microsoft.com/office/drawing/2014/main" id="{3F1CA06A-A2D8-403E-A6EC-989EFB3E288A}"/>
+                <a16:creationId xmlns:a16="http://schemas.microsoft.com/office/drawing/2014/main" id="{F1BE5B77-9F1D-41DD-962D-BE0C399FBD2B}"/>
               </a:ext>
             </a:extLst>
           </p:cNvPr>
@@ -7199,7 +7199,7 @@
           <p:cNvPr id="9" name="">
             <a:extLst xmlns:a="http://schemas.openxmlformats.org/drawingml/2006/main">
               <a:ext uri="{FF2B5EF4-FFF2-40B4-BE49-F238E27FC236}">
-                <a16:creationId xmlns:a16="http://schemas.microsoft.com/office/drawing/2014/main" id="{3CB77A57-1DB2-45D7-A9E5-022BE6FC2B40}"/>
+                <a16:creationId xmlns:a16="http://schemas.microsoft.com/office/drawing/2014/main" id="{A858DBA5-4FB7-422E-A4CB-AC9996190D15}"/>
               </a:ext>
             </a:extLst>
           </p:cNvPr>
@@ -7256,7 +7256,7 @@
           <p:cNvPr id="10" name="">
             <a:extLst xmlns:a="http://schemas.openxmlformats.org/drawingml/2006/main">
               <a:ext uri="{FF2B5EF4-FFF2-40B4-BE49-F238E27FC236}">
-                <a16:creationId xmlns:a16="http://schemas.microsoft.com/office/drawing/2014/main" id="{0B07F60B-1A3A-496A-A67A-B469A9B7AD4E}"/>
+                <a16:creationId xmlns:a16="http://schemas.microsoft.com/office/drawing/2014/main" id="{C626E449-DC03-43F6-AD06-F21FCD7F7EC7}"/>
               </a:ext>
             </a:extLst>
           </p:cNvPr>
@@ -7313,7 +7313,7 @@
           <p:cNvPr id="11" name="">
             <a:extLst xmlns:a="http://schemas.openxmlformats.org/drawingml/2006/main">
               <a:ext uri="{FF2B5EF4-FFF2-40B4-BE49-F238E27FC236}">
-                <a16:creationId xmlns:a16="http://schemas.microsoft.com/office/drawing/2014/main" id="{E5C7D707-FD9C-4E51-8E62-A4BF04A1C3ED}"/>
+                <a16:creationId xmlns:a16="http://schemas.microsoft.com/office/drawing/2014/main" id="{83ED0051-8FEB-41C8-B131-C855D8ED9988}"/>
               </a:ext>
             </a:extLst>
           </p:cNvPr>
@@ -7345,7 +7345,7 @@
           <p:cNvPr id="12" name="">
             <a:extLst xmlns:a="http://schemas.openxmlformats.org/drawingml/2006/main">
               <a:ext uri="{FF2B5EF4-FFF2-40B4-BE49-F238E27FC236}">
-                <a16:creationId xmlns:a16="http://schemas.microsoft.com/office/drawing/2014/main" id="{13C4561F-AF1F-4725-8A1A-3F5E06E17C56}"/>
+                <a16:creationId xmlns:a16="http://schemas.microsoft.com/office/drawing/2014/main" id="{D2846CD8-C6F0-4A2C-8EF8-FB4EBB51764B}"/>
               </a:ext>
             </a:extLst>
           </p:cNvPr>
@@ -7402,7 +7402,7 @@
           <p:cNvPr id="13" name="">
             <a:extLst xmlns:a="http://schemas.openxmlformats.org/drawingml/2006/main">
               <a:ext uri="{FF2B5EF4-FFF2-40B4-BE49-F238E27FC236}">
-                <a16:creationId xmlns:a16="http://schemas.microsoft.com/office/drawing/2014/main" id="{77F601BD-4EB8-4239-83D1-3B71244F5275}"/>
+                <a16:creationId xmlns:a16="http://schemas.microsoft.com/office/drawing/2014/main" id="{8F1AC44B-2183-4807-85E0-0F1B2CE0F2AD}"/>
               </a:ext>
             </a:extLst>
           </p:cNvPr>
@@ -7459,7 +7459,7 @@
           <p:cNvPr id="14" name="">
             <a:extLst xmlns:a="http://schemas.openxmlformats.org/drawingml/2006/main">
               <a:ext uri="{FF2B5EF4-FFF2-40B4-BE49-F238E27FC236}">
-                <a16:creationId xmlns:a16="http://schemas.microsoft.com/office/drawing/2014/main" id="{C4804AEE-B6DF-456B-840F-CCF001CD5834}"/>
+                <a16:creationId xmlns:a16="http://schemas.microsoft.com/office/drawing/2014/main" id="{9DE6022E-9E64-4FAE-ABD5-6F9C6EABFF85}"/>
               </a:ext>
             </a:extLst>
           </p:cNvPr>
@@ -7516,7 +7516,7 @@
           <p:cNvPr id="15" name="">
             <a:extLst xmlns:a="http://schemas.openxmlformats.org/drawingml/2006/main">
               <a:ext uri="{FF2B5EF4-FFF2-40B4-BE49-F238E27FC236}">
-                <a16:creationId xmlns:a16="http://schemas.microsoft.com/office/drawing/2014/main" id="{4D5FED71-FAE2-4B74-ABD0-813FF21A9A90}"/>
+                <a16:creationId xmlns:a16="http://schemas.microsoft.com/office/drawing/2014/main" id="{91C43528-8A8F-49BC-A156-B19A81E6F68F}"/>
               </a:ext>
             </a:extLst>
           </p:cNvPr>
@@ -7571,7 +7571,7 @@
     </p:spTree>
     <p:extLst>
       <p:ext uri="{BB962C8B-B14F-4D97-AF65-F5344CB8AC3E}">
-        <p14:creationId xmlns:p14="http://schemas.microsoft.com/office/powerpoint/2010/main" val="2031623456"/>
+        <p14:creationId xmlns:p14="http://schemas.microsoft.com/office/powerpoint/2010/main" val="158899257"/>
       </p:ext>
     </p:extLst>
   </p:cSld>
@@ -7772,7 +7772,7 @@
           <p:cNvPr id="23" name="">
             <a:extLst xmlns:a="http://schemas.openxmlformats.org/drawingml/2006/main">
               <a:ext uri="{FF2B5EF4-FFF2-40B4-BE49-F238E27FC236}">
-                <a16:creationId xmlns:a16="http://schemas.microsoft.com/office/drawing/2014/main" id="{4C27B6F9-93FB-4297-A29A-15C48FD58680}"/>
+                <a16:creationId xmlns:a16="http://schemas.microsoft.com/office/drawing/2014/main" id="{A3303DD4-DA81-4C3C-8799-66BD40E6B668}"/>
               </a:ext>
             </a:extLst>
           </p:cNvPr>
@@ -7804,7 +7804,7 @@
           <p:cNvPr id="2" name="">
             <a:extLst xmlns:a="http://schemas.openxmlformats.org/drawingml/2006/main">
               <a:ext uri="{FF2B5EF4-FFF2-40B4-BE49-F238E27FC236}">
-                <a16:creationId xmlns:a16="http://schemas.microsoft.com/office/drawing/2014/main" id="{81FADCAF-57F2-4041-83F5-B6E1DDACB02C}"/>
+                <a16:creationId xmlns:a16="http://schemas.microsoft.com/office/drawing/2014/main" id="{5BFAF559-F2E1-4423-ABE6-4DE40A6BDFBA}"/>
               </a:ext>
             </a:extLst>
           </p:cNvPr>
@@ -7861,7 +7861,7 @@
           <p:cNvPr id="3" name="">
             <a:extLst xmlns:a="http://schemas.openxmlformats.org/drawingml/2006/main">
               <a:ext uri="{FF2B5EF4-FFF2-40B4-BE49-F238E27FC236}">
-                <a16:creationId xmlns:a16="http://schemas.microsoft.com/office/drawing/2014/main" id="{E65AE1AB-36B2-4F9F-A0DE-F24F475D4100}"/>
+                <a16:creationId xmlns:a16="http://schemas.microsoft.com/office/drawing/2014/main" id="{3C3FC701-4E0F-4C65-A6AD-EC3D3C53A621}"/>
               </a:ext>
             </a:extLst>
           </p:cNvPr>
@@ -7893,7 +7893,7 @@
           <p:cNvPr id="4" name="">
             <a:extLst xmlns:a="http://schemas.openxmlformats.org/drawingml/2006/main">
               <a:ext uri="{FF2B5EF4-FFF2-40B4-BE49-F238E27FC236}">
-                <a16:creationId xmlns:a16="http://schemas.microsoft.com/office/drawing/2014/main" id="{C710F46C-CD6D-4B8E-8762-DE0F424123F2}"/>
+                <a16:creationId xmlns:a16="http://schemas.microsoft.com/office/drawing/2014/main" id="{09B29E58-E916-4AD8-AFBB-70CA6217290B}"/>
               </a:ext>
             </a:extLst>
           </p:cNvPr>
@@ -7950,7 +7950,7 @@
           <p:cNvPr id="5" name="">
             <a:extLst xmlns:a="http://schemas.openxmlformats.org/drawingml/2006/main">
               <a:ext uri="{FF2B5EF4-FFF2-40B4-BE49-F238E27FC236}">
-                <a16:creationId xmlns:a16="http://schemas.microsoft.com/office/drawing/2014/main" id="{5076F796-2F5B-4EFB-AEF4-4B0833318113}"/>
+                <a16:creationId xmlns:a16="http://schemas.microsoft.com/office/drawing/2014/main" id="{093DD3A9-A461-4039-8E6C-D8052DB7CEB0}"/>
               </a:ext>
             </a:extLst>
           </p:cNvPr>
@@ -8007,7 +8007,7 @@
           <p:cNvPr id="6" name="">
             <a:extLst xmlns:a="http://schemas.openxmlformats.org/drawingml/2006/main">
               <a:ext uri="{FF2B5EF4-FFF2-40B4-BE49-F238E27FC236}">
-                <a16:creationId xmlns:a16="http://schemas.microsoft.com/office/drawing/2014/main" id="{B0DCFD74-708D-41D4-B780-8DC7BAB01E10}"/>
+                <a16:creationId xmlns:a16="http://schemas.microsoft.com/office/drawing/2014/main" id="{C8C4B2E1-D472-48BF-9834-7C18A6F6E4AB}"/>
               </a:ext>
             </a:extLst>
           </p:cNvPr>
@@ -8064,7 +8064,7 @@
           <p:cNvPr id="7" name="">
             <a:extLst xmlns:a="http://schemas.openxmlformats.org/drawingml/2006/main">
               <a:ext uri="{FF2B5EF4-FFF2-40B4-BE49-F238E27FC236}">
-                <a16:creationId xmlns:a16="http://schemas.microsoft.com/office/drawing/2014/main" id="{CC24B726-2429-46B4-A6C4-F7CEAD4A71DB}"/>
+                <a16:creationId xmlns:a16="http://schemas.microsoft.com/office/drawing/2014/main" id="{E7828606-5E82-47B6-A2D8-587E6A06AEB9}"/>
               </a:ext>
             </a:extLst>
           </p:cNvPr>
@@ -8096,7 +8096,7 @@
           <p:cNvPr id="8" name="">
             <a:extLst xmlns:a="http://schemas.openxmlformats.org/drawingml/2006/main">
               <a:ext uri="{FF2B5EF4-FFF2-40B4-BE49-F238E27FC236}">
-                <a16:creationId xmlns:a16="http://schemas.microsoft.com/office/drawing/2014/main" id="{3EC42B75-76E4-4327-82B1-72F17B14AC9F}"/>
+                <a16:creationId xmlns:a16="http://schemas.microsoft.com/office/drawing/2014/main" id="{BB7C4948-16E9-4198-90C7-32A9C9D095A6}"/>
               </a:ext>
             </a:extLst>
           </p:cNvPr>
@@ -8153,7 +8153,7 @@
           <p:cNvPr id="9" name="">
             <a:extLst xmlns:a="http://schemas.openxmlformats.org/drawingml/2006/main">
               <a:ext uri="{FF2B5EF4-FFF2-40B4-BE49-F238E27FC236}">
-                <a16:creationId xmlns:a16="http://schemas.microsoft.com/office/drawing/2014/main" id="{F1881710-D2C5-4047-992A-C6EDC564B3A8}"/>
+                <a16:creationId xmlns:a16="http://schemas.microsoft.com/office/drawing/2014/main" id="{272B3F64-A637-4D07-ABDA-4AAD716F43DA}"/>
               </a:ext>
             </a:extLst>
           </p:cNvPr>
@@ -8210,19 +8210,19 @@
           <p:cNvPr id="10" name="">
             <a:extLst xmlns:a="http://schemas.openxmlformats.org/drawingml/2006/main">
               <a:ext uri="{FF2B5EF4-FFF2-40B4-BE49-F238E27FC236}">
-                <a16:creationId xmlns:a16="http://schemas.microsoft.com/office/drawing/2014/main" id="{C90F75CA-CC21-4582-9B9C-44FAD089BE52}"/>
-              </a:ext>
-            </a:extLst>
-          </p:cNvPr>
-          <p:cNvSpPr>
-            <a:spLocks xmlns:a="http://schemas.openxmlformats.org/drawingml/2006/main" noGrp="1"/>
-          </p:cNvSpPr>
-          <p:nvPr/>
-        </p:nvSpPr>
-        <p:spPr>
-          <a:xfrm xmlns:a="http://schemas.openxmlformats.org/drawingml/2006/main">
-            <a:off x="914400" y="1257300"/>
-            <a:ext cx="10363200" cy="781050"/>
+                <a16:creationId xmlns:a16="http://schemas.microsoft.com/office/drawing/2014/main" id="{E127D08A-834F-4185-B3FF-E46D02B7AFD7}"/>
+              </a:ext>
+            </a:extLst>
+          </p:cNvPr>
+          <p:cNvSpPr>
+            <a:spLocks xmlns:a="http://schemas.openxmlformats.org/drawingml/2006/main" noGrp="1"/>
+          </p:cNvSpPr>
+          <p:nvPr/>
+        </p:nvSpPr>
+        <p:spPr>
+          <a:xfrm xmlns:a="http://schemas.openxmlformats.org/drawingml/2006/main">
+            <a:off x="857250" y="1219200"/>
+            <a:ext cx="10477500" cy="742950"/>
           </a:xfrm>
           <a:prstGeom xmlns:a="http://schemas.openxmlformats.org/drawingml/2006/main" prst="rect">
             <a:avLst/>
@@ -8239,7 +8239,7 @@
           <a:lstStyle xmlns:a="http://schemas.openxmlformats.org/drawingml/2006/main"/>
           <a:p xmlns:a="http://schemas.openxmlformats.org/drawingml/2006/main">
             <a:pPr algn="ctr">
-              <a:defRPr sz="2175" b="1">
+              <a:defRPr sz="2100" b="1">
                 <a:solidFill>
                   <a:srgbClr val="17253A"/>
                 </a:solidFill>
@@ -8249,7 +8249,7 @@
               </a:defRPr>
             </a:pPr>
             <a:r>
-              <a:rPr sz="2175" b="1">
+              <a:rPr sz="2100" b="1">
                 <a:solidFill>
                   <a:srgbClr val="17253A"/>
                 </a:solidFill>
@@ -8267,28 +8267,30 @@
           <p:cNvPr id="11" name="">
             <a:extLst xmlns:a="http://schemas.openxmlformats.org/drawingml/2006/main">
               <a:ext uri="{FF2B5EF4-FFF2-40B4-BE49-F238E27FC236}">
-                <a16:creationId xmlns:a16="http://schemas.microsoft.com/office/drawing/2014/main" id="{097A5332-744A-4C6A-B560-BF441921DB2C}"/>
-              </a:ext>
-            </a:extLst>
-          </p:cNvPr>
-          <p:cNvSpPr>
-            <a:spLocks xmlns:a="http://schemas.openxmlformats.org/drawingml/2006/main" noGrp="1"/>
-          </p:cNvSpPr>
-          <p:nvPr/>
-        </p:nvSpPr>
-        <p:spPr>
-          <a:xfrm xmlns:a="http://schemas.openxmlformats.org/drawingml/2006/main">
-            <a:off x="1000125" y="2247900"/>
-            <a:ext cx="476250" cy="476250"/>
-          </a:xfrm>
-          <a:prstGeom xmlns:a="http://schemas.openxmlformats.org/drawingml/2006/main" prst="ellipse">
+                <a16:creationId xmlns:a16="http://schemas.microsoft.com/office/drawing/2014/main" id="{F2ABA5CD-B7A0-4192-B998-1CE25A552877}"/>
+              </a:ext>
+            </a:extLst>
+          </p:cNvPr>
+          <p:cNvSpPr>
+            <a:spLocks xmlns:a="http://schemas.openxmlformats.org/drawingml/2006/main" noGrp="1"/>
+          </p:cNvSpPr>
+          <p:nvPr/>
+        </p:nvSpPr>
+        <p:spPr>
+          <a:xfrm xmlns:a="http://schemas.openxmlformats.org/drawingml/2006/main">
+            <a:off x="971550" y="2124075"/>
+            <a:ext cx="38100" cy="3524250"/>
+          </a:xfrm>
+          <a:prstGeom xmlns:a="http://schemas.openxmlformats.org/drawingml/2006/main" prst="rect">
             <a:avLst/>
           </a:prstGeom>
           <a:solidFill xmlns:a="http://schemas.openxmlformats.org/drawingml/2006/main">
-            <a:srgbClr val="18324A"/>
+            <a:srgbClr val="2C6E73"/>
           </a:solidFill>
           <a:ln xmlns:a="http://schemas.openxmlformats.org/drawingml/2006/main" w="0">
-            <a:noFill/>
+            <a:solidFill>
+              <a:srgbClr val="2C6E73"/>
+            </a:solidFill>
           </a:ln>
         </p:spPr>
       </p:sp>
@@ -8297,19 +8299,19 @@
           <p:cNvPr id="12" name="">
             <a:extLst xmlns:a="http://schemas.openxmlformats.org/drawingml/2006/main">
               <a:ext uri="{FF2B5EF4-FFF2-40B4-BE49-F238E27FC236}">
-                <a16:creationId xmlns:a16="http://schemas.microsoft.com/office/drawing/2014/main" id="{DBBCB985-399E-4BF7-A20E-B6C5A4307C81}"/>
-              </a:ext>
-            </a:extLst>
-          </p:cNvPr>
-          <p:cNvSpPr>
-            <a:spLocks xmlns:a="http://schemas.openxmlformats.org/drawingml/2006/main" noGrp="1"/>
-          </p:cNvSpPr>
-          <p:nvPr/>
-        </p:nvSpPr>
-        <p:spPr>
-          <a:xfrm xmlns:a="http://schemas.openxmlformats.org/drawingml/2006/main">
-            <a:off x="1000125" y="2276475"/>
-            <a:ext cx="476250" cy="419100"/>
+                <a16:creationId xmlns:a16="http://schemas.microsoft.com/office/drawing/2014/main" id="{4D16AD53-B4DC-4006-B2C0-6D4F0BB4584D}"/>
+              </a:ext>
+            </a:extLst>
+          </p:cNvPr>
+          <p:cNvSpPr>
+            <a:spLocks xmlns:a="http://schemas.openxmlformats.org/drawingml/2006/main" noGrp="1"/>
+          </p:cNvSpPr>
+          <p:nvPr/>
+        </p:nvSpPr>
+        <p:spPr>
+          <a:xfrm xmlns:a="http://schemas.openxmlformats.org/drawingml/2006/main">
+            <a:off x="1162050" y="2200275"/>
+            <a:ext cx="400050" cy="400050"/>
           </a:xfrm>
           <a:prstGeom xmlns:a="http://schemas.openxmlformats.org/drawingml/2006/main" prst="rect">
             <a:avLst/>
@@ -8326,9 +8328,9 @@
           <a:lstStyle xmlns:a="http://schemas.openxmlformats.org/drawingml/2006/main"/>
           <a:p xmlns:a="http://schemas.openxmlformats.org/drawingml/2006/main">
             <a:pPr algn="ctr">
-              <a:defRPr sz="1350" b="1">
-                <a:solidFill>
-                  <a:srgbClr val="FFFFFF"/>
+              <a:defRPr sz="1125" b="1">
+                <a:solidFill>
+                  <a:srgbClr val="2C6E73"/>
                 </a:solidFill>
                 <a:latin typeface="Arial"/>
                 <a:ea typeface="Arial"/>
@@ -8336,9 +8338,9 @@
               </a:defRPr>
             </a:pPr>
             <a:r>
-              <a:rPr sz="1350" b="1">
-                <a:solidFill>
-                  <a:srgbClr val="FFFFFF"/>
+              <a:rPr sz="1125" b="1">
+                <a:solidFill>
+                  <a:srgbClr val="2C6E73"/>
                 </a:solidFill>
                 <a:latin typeface="Arial"/>
                 <a:ea typeface="Arial"/>
@@ -8354,19 +8356,19 @@
           <p:cNvPr id="13" name="">
             <a:extLst xmlns:a="http://schemas.openxmlformats.org/drawingml/2006/main">
               <a:ext uri="{FF2B5EF4-FFF2-40B4-BE49-F238E27FC236}">
-                <a16:creationId xmlns:a16="http://schemas.microsoft.com/office/drawing/2014/main" id="{93676C1B-8144-423F-B764-306CA8F5C3C9}"/>
-              </a:ext>
-            </a:extLst>
-          </p:cNvPr>
-          <p:cNvSpPr>
-            <a:spLocks xmlns:a="http://schemas.openxmlformats.org/drawingml/2006/main" noGrp="1"/>
-          </p:cNvSpPr>
-          <p:nvPr/>
-        </p:nvSpPr>
-        <p:spPr>
-          <a:xfrm xmlns:a="http://schemas.openxmlformats.org/drawingml/2006/main">
-            <a:off x="1714500" y="2181225"/>
-            <a:ext cx="9429750" cy="609600"/>
+                <a16:creationId xmlns:a16="http://schemas.microsoft.com/office/drawing/2014/main" id="{D1C90BD1-E075-4FAA-A00B-7DB590E552F3}"/>
+              </a:ext>
+            </a:extLst>
+          </p:cNvPr>
+          <p:cNvSpPr>
+            <a:spLocks xmlns:a="http://schemas.openxmlformats.org/drawingml/2006/main" noGrp="1"/>
+          </p:cNvSpPr>
+          <p:nvPr/>
+        </p:nvSpPr>
+        <p:spPr>
+          <a:xfrm xmlns:a="http://schemas.openxmlformats.org/drawingml/2006/main">
+            <a:off x="1714500" y="2114550"/>
+            <a:ext cx="9525000" cy="809625"/>
           </a:xfrm>
           <a:prstGeom xmlns:a="http://schemas.openxmlformats.org/drawingml/2006/main" prst="rect">
             <a:avLst/>
@@ -8383,7 +8385,7 @@
           <a:lstStyle xmlns:a="http://schemas.openxmlformats.org/drawingml/2006/main"/>
           <a:p xmlns:a="http://schemas.openxmlformats.org/drawingml/2006/main">
             <a:pPr algn="l">
-              <a:defRPr sz="1500" b="0">
+              <a:defRPr sz="1725" b="0">
                 <a:solidFill>
                   <a:srgbClr val="17253A"/>
                 </a:solidFill>
@@ -8393,7 +8395,7 @@
               </a:defRPr>
             </a:pPr>
             <a:r>
-              <a:rPr sz="1500" b="0">
+              <a:rPr sz="1725" b="0">
                 <a:solidFill>
                   <a:srgbClr val="17253A"/>
                 </a:solidFill>
@@ -8401,7 +8403,7 @@
                 <a:ea typeface="Arial"/>
                 <a:cs typeface="Arial"/>
               </a:rPr>
-              <a:t>Identify the structure: Identify the required measure and mark the relevant lengths.</a:t>
+              <a:t>Area = 54 cm², base = 12 cm</a:t>
             </a:r>
           </a:p>
         </p:txBody>
@@ -8411,28 +8413,30 @@
           <p:cNvPr id="14" name="">
             <a:extLst xmlns:a="http://schemas.openxmlformats.org/drawingml/2006/main">
               <a:ext uri="{FF2B5EF4-FFF2-40B4-BE49-F238E27FC236}">
-                <a16:creationId xmlns:a16="http://schemas.microsoft.com/office/drawing/2014/main" id="{5D72BFF9-0D65-4317-AC96-E395F1C57A5D}"/>
-              </a:ext>
-            </a:extLst>
-          </p:cNvPr>
-          <p:cNvSpPr>
-            <a:spLocks xmlns:a="http://schemas.openxmlformats.org/drawingml/2006/main" noGrp="1"/>
-          </p:cNvSpPr>
-          <p:nvPr/>
-        </p:nvSpPr>
-        <p:spPr>
-          <a:xfrm xmlns:a="http://schemas.openxmlformats.org/drawingml/2006/main">
-            <a:off x="1000125" y="2990850"/>
-            <a:ext cx="476250" cy="476250"/>
-          </a:xfrm>
-          <a:prstGeom xmlns:a="http://schemas.openxmlformats.org/drawingml/2006/main" prst="ellipse">
+                <a16:creationId xmlns:a16="http://schemas.microsoft.com/office/drawing/2014/main" id="{6ED15FCF-191A-46C7-AD96-B5E4BFE87751}"/>
+              </a:ext>
+            </a:extLst>
+          </p:cNvPr>
+          <p:cNvSpPr>
+            <a:spLocks xmlns:a="http://schemas.openxmlformats.org/drawingml/2006/main" noGrp="1"/>
+          </p:cNvSpPr>
+          <p:nvPr/>
+        </p:nvSpPr>
+        <p:spPr>
+          <a:xfrm xmlns:a="http://schemas.openxmlformats.org/drawingml/2006/main">
+            <a:off x="1714500" y="2943225"/>
+            <a:ext cx="9334500" cy="9525"/>
+          </a:xfrm>
+          <a:prstGeom xmlns:a="http://schemas.openxmlformats.org/drawingml/2006/main" prst="rect">
             <a:avLst/>
           </a:prstGeom>
           <a:solidFill xmlns:a="http://schemas.openxmlformats.org/drawingml/2006/main">
-            <a:srgbClr val="2C6E73"/>
+            <a:srgbClr val="D9E0E6"/>
           </a:solidFill>
           <a:ln xmlns:a="http://schemas.openxmlformats.org/drawingml/2006/main" w="0">
-            <a:noFill/>
+            <a:solidFill>
+              <a:srgbClr val="D9E0E6"/>
+            </a:solidFill>
           </a:ln>
         </p:spPr>
       </p:sp>
@@ -8441,19 +8445,19 @@
           <p:cNvPr id="15" name="">
             <a:extLst xmlns:a="http://schemas.openxmlformats.org/drawingml/2006/main">
               <a:ext uri="{FF2B5EF4-FFF2-40B4-BE49-F238E27FC236}">
-                <a16:creationId xmlns:a16="http://schemas.microsoft.com/office/drawing/2014/main" id="{8797222F-F34E-483C-96B3-3E0E18DBC6FE}"/>
-              </a:ext>
-            </a:extLst>
-          </p:cNvPr>
-          <p:cNvSpPr>
-            <a:spLocks xmlns:a="http://schemas.openxmlformats.org/drawingml/2006/main" noGrp="1"/>
-          </p:cNvSpPr>
-          <p:nvPr/>
-        </p:nvSpPr>
-        <p:spPr>
-          <a:xfrm xmlns:a="http://schemas.openxmlformats.org/drawingml/2006/main">
-            <a:off x="1000125" y="3019425"/>
-            <a:ext cx="476250" cy="419100"/>
+                <a16:creationId xmlns:a16="http://schemas.microsoft.com/office/drawing/2014/main" id="{10D2812D-46AF-427A-8F4D-D0120B80E6E4}"/>
+              </a:ext>
+            </a:extLst>
+          </p:cNvPr>
+          <p:cNvSpPr>
+            <a:spLocks xmlns:a="http://schemas.openxmlformats.org/drawingml/2006/main" noGrp="1"/>
+          </p:cNvSpPr>
+          <p:nvPr/>
+        </p:nvSpPr>
+        <p:spPr>
+          <a:xfrm xmlns:a="http://schemas.openxmlformats.org/drawingml/2006/main">
+            <a:off x="1162050" y="3076575"/>
+            <a:ext cx="400050" cy="400050"/>
           </a:xfrm>
           <a:prstGeom xmlns:a="http://schemas.openxmlformats.org/drawingml/2006/main" prst="rect">
             <a:avLst/>
@@ -8470,9 +8474,9 @@
           <a:lstStyle xmlns:a="http://schemas.openxmlformats.org/drawingml/2006/main"/>
           <a:p xmlns:a="http://schemas.openxmlformats.org/drawingml/2006/main">
             <a:pPr algn="ctr">
-              <a:defRPr sz="1350" b="1">
-                <a:solidFill>
-                  <a:srgbClr val="FFFFFF"/>
+              <a:defRPr sz="1125" b="1">
+                <a:solidFill>
+                  <a:srgbClr val="2C6E73"/>
                 </a:solidFill>
                 <a:latin typeface="Arial"/>
                 <a:ea typeface="Arial"/>
@@ -8480,9 +8484,9 @@
               </a:defRPr>
             </a:pPr>
             <a:r>
-              <a:rPr sz="1350" b="1">
-                <a:solidFill>
-                  <a:srgbClr val="FFFFFF"/>
+              <a:rPr sz="1125" b="1">
+                <a:solidFill>
+                  <a:srgbClr val="2C6E73"/>
                 </a:solidFill>
                 <a:latin typeface="Arial"/>
                 <a:ea typeface="Arial"/>
@@ -8498,19 +8502,19 @@
           <p:cNvPr id="16" name="">
             <a:extLst xmlns:a="http://schemas.openxmlformats.org/drawingml/2006/main">
               <a:ext uri="{FF2B5EF4-FFF2-40B4-BE49-F238E27FC236}">
-                <a16:creationId xmlns:a16="http://schemas.microsoft.com/office/drawing/2014/main" id="{0CCC38B3-5FCB-4FAD-A97B-7CBD3B7731F0}"/>
-              </a:ext>
-            </a:extLst>
-          </p:cNvPr>
-          <p:cNvSpPr>
-            <a:spLocks xmlns:a="http://schemas.openxmlformats.org/drawingml/2006/main" noGrp="1"/>
-          </p:cNvSpPr>
-          <p:nvPr/>
-        </p:nvSpPr>
-        <p:spPr>
-          <a:xfrm xmlns:a="http://schemas.openxmlformats.org/drawingml/2006/main">
-            <a:off x="1714500" y="2924175"/>
-            <a:ext cx="9429750" cy="609600"/>
+                <a16:creationId xmlns:a16="http://schemas.microsoft.com/office/drawing/2014/main" id="{F58DFEAC-9D33-4738-9B65-168F44143000}"/>
+              </a:ext>
+            </a:extLst>
+          </p:cNvPr>
+          <p:cNvSpPr>
+            <a:spLocks xmlns:a="http://schemas.openxmlformats.org/drawingml/2006/main" noGrp="1"/>
+          </p:cNvSpPr>
+          <p:nvPr/>
+        </p:nvSpPr>
+        <p:spPr>
+          <a:xfrm xmlns:a="http://schemas.openxmlformats.org/drawingml/2006/main">
+            <a:off x="1714500" y="2990850"/>
+            <a:ext cx="9525000" cy="809625"/>
           </a:xfrm>
           <a:prstGeom xmlns:a="http://schemas.openxmlformats.org/drawingml/2006/main" prst="rect">
             <a:avLst/>
@@ -8527,7 +8531,7 @@
           <a:lstStyle xmlns:a="http://schemas.openxmlformats.org/drawingml/2006/main"/>
           <a:p xmlns:a="http://schemas.openxmlformats.org/drawingml/2006/main">
             <a:pPr algn="l">
-              <a:defRPr sz="1500" b="0">
+              <a:defRPr sz="1725" b="0">
                 <a:solidFill>
                   <a:srgbClr val="17253A"/>
                 </a:solidFill>
@@ -8537,7 +8541,7 @@
               </a:defRPr>
             </a:pPr>
             <a:r>
-              <a:rPr sz="1500" b="0">
+              <a:rPr sz="1725" b="0">
                 <a:solidFill>
                   <a:srgbClr val="17253A"/>
                 </a:solidFill>
@@ -8545,7 +8549,7 @@
                 <a:ea typeface="Arial"/>
                 <a:cs typeface="Arial"/>
               </a:rPr>
-              <a:t>Set up the method: Use the perpendicular height, not a sloping side, in the area formula.</a:t>
+              <a:t>54 = 12 × height ÷ 2</a:t>
             </a:r>
           </a:p>
         </p:txBody>
@@ -8555,28 +8559,30 @@
           <p:cNvPr id="17" name="">
             <a:extLst xmlns:a="http://schemas.openxmlformats.org/drawingml/2006/main">
               <a:ext uri="{FF2B5EF4-FFF2-40B4-BE49-F238E27FC236}">
-                <a16:creationId xmlns:a16="http://schemas.microsoft.com/office/drawing/2014/main" id="{F4AA9FF5-F1C4-47BD-BE6F-A9CCD31E3944}"/>
-              </a:ext>
-            </a:extLst>
-          </p:cNvPr>
-          <p:cNvSpPr>
-            <a:spLocks xmlns:a="http://schemas.openxmlformats.org/drawingml/2006/main" noGrp="1"/>
-          </p:cNvSpPr>
-          <p:nvPr/>
-        </p:nvSpPr>
-        <p:spPr>
-          <a:xfrm xmlns:a="http://schemas.openxmlformats.org/drawingml/2006/main">
-            <a:off x="1000125" y="3733800"/>
-            <a:ext cx="476250" cy="476250"/>
-          </a:xfrm>
-          <a:prstGeom xmlns:a="http://schemas.openxmlformats.org/drawingml/2006/main" prst="ellipse">
+                <a16:creationId xmlns:a16="http://schemas.microsoft.com/office/drawing/2014/main" id="{07AFFC2F-A39A-45E0-A12F-BD52F15E8AA6}"/>
+              </a:ext>
+            </a:extLst>
+          </p:cNvPr>
+          <p:cNvSpPr>
+            <a:spLocks xmlns:a="http://schemas.openxmlformats.org/drawingml/2006/main" noGrp="1"/>
+          </p:cNvSpPr>
+          <p:nvPr/>
+        </p:nvSpPr>
+        <p:spPr>
+          <a:xfrm xmlns:a="http://schemas.openxmlformats.org/drawingml/2006/main">
+            <a:off x="1714500" y="3819525"/>
+            <a:ext cx="9334500" cy="9525"/>
+          </a:xfrm>
+          <a:prstGeom xmlns:a="http://schemas.openxmlformats.org/drawingml/2006/main" prst="rect">
             <a:avLst/>
           </a:prstGeom>
           <a:solidFill xmlns:a="http://schemas.openxmlformats.org/drawingml/2006/main">
-            <a:srgbClr val="2C6E73"/>
+            <a:srgbClr val="D9E0E6"/>
           </a:solidFill>
           <a:ln xmlns:a="http://schemas.openxmlformats.org/drawingml/2006/main" w="0">
-            <a:noFill/>
+            <a:solidFill>
+              <a:srgbClr val="D9E0E6"/>
+            </a:solidFill>
           </a:ln>
         </p:spPr>
       </p:sp>
@@ -8585,19 +8591,19 @@
           <p:cNvPr id="18" name="">
             <a:extLst xmlns:a="http://schemas.openxmlformats.org/drawingml/2006/main">
               <a:ext uri="{FF2B5EF4-FFF2-40B4-BE49-F238E27FC236}">
-                <a16:creationId xmlns:a16="http://schemas.microsoft.com/office/drawing/2014/main" id="{C0D7C7FA-65E6-4BC2-8318-66391491684A}"/>
-              </a:ext>
-            </a:extLst>
-          </p:cNvPr>
-          <p:cNvSpPr>
-            <a:spLocks xmlns:a="http://schemas.openxmlformats.org/drawingml/2006/main" noGrp="1"/>
-          </p:cNvSpPr>
-          <p:nvPr/>
-        </p:nvSpPr>
-        <p:spPr>
-          <a:xfrm xmlns:a="http://schemas.openxmlformats.org/drawingml/2006/main">
-            <a:off x="1000125" y="3762375"/>
-            <a:ext cx="476250" cy="419100"/>
+                <a16:creationId xmlns:a16="http://schemas.microsoft.com/office/drawing/2014/main" id="{0E226E1F-2358-45B6-BC28-E1007254471C}"/>
+              </a:ext>
+            </a:extLst>
+          </p:cNvPr>
+          <p:cNvSpPr>
+            <a:spLocks xmlns:a="http://schemas.openxmlformats.org/drawingml/2006/main" noGrp="1"/>
+          </p:cNvSpPr>
+          <p:nvPr/>
+        </p:nvSpPr>
+        <p:spPr>
+          <a:xfrm xmlns:a="http://schemas.openxmlformats.org/drawingml/2006/main">
+            <a:off x="1162050" y="3952875"/>
+            <a:ext cx="400050" cy="400050"/>
           </a:xfrm>
           <a:prstGeom xmlns:a="http://schemas.openxmlformats.org/drawingml/2006/main" prst="rect">
             <a:avLst/>
@@ -8614,9 +8620,9 @@
           <a:lstStyle xmlns:a="http://schemas.openxmlformats.org/drawingml/2006/main"/>
           <a:p xmlns:a="http://schemas.openxmlformats.org/drawingml/2006/main">
             <a:pPr algn="ctr">
-              <a:defRPr sz="1350" b="1">
-                <a:solidFill>
-                  <a:srgbClr val="FFFFFF"/>
+              <a:defRPr sz="1125" b="1">
+                <a:solidFill>
+                  <a:srgbClr val="2C6E73"/>
                 </a:solidFill>
                 <a:latin typeface="Arial"/>
                 <a:ea typeface="Arial"/>
@@ -8624,9 +8630,9 @@
               </a:defRPr>
             </a:pPr>
             <a:r>
-              <a:rPr sz="1350" b="1">
-                <a:solidFill>
-                  <a:srgbClr val="FFFFFF"/>
+              <a:rPr sz="1125" b="1">
+                <a:solidFill>
+                  <a:srgbClr val="2C6E73"/>
                 </a:solidFill>
                 <a:latin typeface="Arial"/>
                 <a:ea typeface="Arial"/>
@@ -8642,19 +8648,19 @@
           <p:cNvPr id="19" name="">
             <a:extLst xmlns:a="http://schemas.openxmlformats.org/drawingml/2006/main">
               <a:ext uri="{FF2B5EF4-FFF2-40B4-BE49-F238E27FC236}">
-                <a16:creationId xmlns:a16="http://schemas.microsoft.com/office/drawing/2014/main" id="{DD9F3C93-606B-4FC3-B780-796F2E71CF8C}"/>
-              </a:ext>
-            </a:extLst>
-          </p:cNvPr>
-          <p:cNvSpPr>
-            <a:spLocks xmlns:a="http://schemas.openxmlformats.org/drawingml/2006/main" noGrp="1"/>
-          </p:cNvSpPr>
-          <p:nvPr/>
-        </p:nvSpPr>
-        <p:spPr>
-          <a:xfrm xmlns:a="http://schemas.openxmlformats.org/drawingml/2006/main">
-            <a:off x="1714500" y="3667125"/>
-            <a:ext cx="9429750" cy="609600"/>
+                <a16:creationId xmlns:a16="http://schemas.microsoft.com/office/drawing/2014/main" id="{1C3CBE83-D2A0-482E-B3B7-56583E8E8454}"/>
+              </a:ext>
+            </a:extLst>
+          </p:cNvPr>
+          <p:cNvSpPr>
+            <a:spLocks xmlns:a="http://schemas.openxmlformats.org/drawingml/2006/main" noGrp="1"/>
+          </p:cNvSpPr>
+          <p:nvPr/>
+        </p:nvSpPr>
+        <p:spPr>
+          <a:xfrm xmlns:a="http://schemas.openxmlformats.org/drawingml/2006/main">
+            <a:off x="1714500" y="3867150"/>
+            <a:ext cx="9525000" cy="809625"/>
           </a:xfrm>
           <a:prstGeom xmlns:a="http://schemas.openxmlformats.org/drawingml/2006/main" prst="rect">
             <a:avLst/>
@@ -8671,7 +8677,7 @@
           <a:lstStyle xmlns:a="http://schemas.openxmlformats.org/drawingml/2006/main"/>
           <a:p xmlns:a="http://schemas.openxmlformats.org/drawingml/2006/main">
             <a:pPr algn="l">
-              <a:defRPr sz="1500" b="0">
+              <a:defRPr sz="1725" b="0">
                 <a:solidFill>
                   <a:srgbClr val="17253A"/>
                 </a:solidFill>
@@ -8681,7 +8687,7 @@
               </a:defRPr>
             </a:pPr>
             <a:r>
-              <a:rPr sz="1500" b="0">
+              <a:rPr sz="1725" b="0">
                 <a:solidFill>
                   <a:srgbClr val="17253A"/>
                 </a:solidFill>
@@ -8689,7 +8695,7 @@
                 <a:ea typeface="Arial"/>
                 <a:cs typeface="Arial"/>
               </a:rPr>
-              <a:t>Complete the calculation: 9 cm.</a:t>
+              <a:t>54 × 2 = 12 × height</a:t>
             </a:r>
           </a:p>
         </p:txBody>
@@ -8699,28 +8705,30 @@
           <p:cNvPr id="20" name="">
             <a:extLst xmlns:a="http://schemas.openxmlformats.org/drawingml/2006/main">
               <a:ext uri="{FF2B5EF4-FFF2-40B4-BE49-F238E27FC236}">
-                <a16:creationId xmlns:a16="http://schemas.microsoft.com/office/drawing/2014/main" id="{4844A2FB-5A1B-45AA-89B9-AFFD65704A6A}"/>
-              </a:ext>
-            </a:extLst>
-          </p:cNvPr>
-          <p:cNvSpPr>
-            <a:spLocks xmlns:a="http://schemas.openxmlformats.org/drawingml/2006/main" noGrp="1"/>
-          </p:cNvSpPr>
-          <p:nvPr/>
-        </p:nvSpPr>
-        <p:spPr>
-          <a:xfrm xmlns:a="http://schemas.openxmlformats.org/drawingml/2006/main">
-            <a:off x="1000125" y="4476750"/>
-            <a:ext cx="476250" cy="476250"/>
-          </a:xfrm>
-          <a:prstGeom xmlns:a="http://schemas.openxmlformats.org/drawingml/2006/main" prst="ellipse">
+                <a16:creationId xmlns:a16="http://schemas.microsoft.com/office/drawing/2014/main" id="{455B5624-AF4D-489A-B538-FBF013DBFA66}"/>
+              </a:ext>
+            </a:extLst>
+          </p:cNvPr>
+          <p:cNvSpPr>
+            <a:spLocks xmlns:a="http://schemas.openxmlformats.org/drawingml/2006/main" noGrp="1"/>
+          </p:cNvSpPr>
+          <p:nvPr/>
+        </p:nvSpPr>
+        <p:spPr>
+          <a:xfrm xmlns:a="http://schemas.openxmlformats.org/drawingml/2006/main">
+            <a:off x="1714500" y="4695825"/>
+            <a:ext cx="9334500" cy="9525"/>
+          </a:xfrm>
+          <a:prstGeom xmlns:a="http://schemas.openxmlformats.org/drawingml/2006/main" prst="rect">
             <a:avLst/>
           </a:prstGeom>
           <a:solidFill xmlns:a="http://schemas.openxmlformats.org/drawingml/2006/main">
-            <a:srgbClr val="2C6E73"/>
+            <a:srgbClr val="D9E0E6"/>
           </a:solidFill>
           <a:ln xmlns:a="http://schemas.openxmlformats.org/drawingml/2006/main" w="0">
-            <a:noFill/>
+            <a:solidFill>
+              <a:srgbClr val="D9E0E6"/>
+            </a:solidFill>
           </a:ln>
         </p:spPr>
       </p:sp>
@@ -8729,19 +8737,19 @@
           <p:cNvPr id="21" name="">
             <a:extLst xmlns:a="http://schemas.openxmlformats.org/drawingml/2006/main">
               <a:ext uri="{FF2B5EF4-FFF2-40B4-BE49-F238E27FC236}">
-                <a16:creationId xmlns:a16="http://schemas.microsoft.com/office/drawing/2014/main" id="{7B57B72F-966A-4C9A-9A44-B67EC799C4E7}"/>
-              </a:ext>
-            </a:extLst>
-          </p:cNvPr>
-          <p:cNvSpPr>
-            <a:spLocks xmlns:a="http://schemas.openxmlformats.org/drawingml/2006/main" noGrp="1"/>
-          </p:cNvSpPr>
-          <p:nvPr/>
-        </p:nvSpPr>
-        <p:spPr>
-          <a:xfrm xmlns:a="http://schemas.openxmlformats.org/drawingml/2006/main">
-            <a:off x="1000125" y="4505325"/>
-            <a:ext cx="476250" cy="419100"/>
+                <a16:creationId xmlns:a16="http://schemas.microsoft.com/office/drawing/2014/main" id="{37E89EF3-ED89-434B-A95C-91AA50F2B611}"/>
+              </a:ext>
+            </a:extLst>
+          </p:cNvPr>
+          <p:cNvSpPr>
+            <a:spLocks xmlns:a="http://schemas.openxmlformats.org/drawingml/2006/main" noGrp="1"/>
+          </p:cNvSpPr>
+          <p:nvPr/>
+        </p:nvSpPr>
+        <p:spPr>
+          <a:xfrm xmlns:a="http://schemas.openxmlformats.org/drawingml/2006/main">
+            <a:off x="1162050" y="4829175"/>
+            <a:ext cx="400050" cy="400050"/>
           </a:xfrm>
           <a:prstGeom xmlns:a="http://schemas.openxmlformats.org/drawingml/2006/main" prst="rect">
             <a:avLst/>
@@ -8758,9 +8766,9 @@
           <a:lstStyle xmlns:a="http://schemas.openxmlformats.org/drawingml/2006/main"/>
           <a:p xmlns:a="http://schemas.openxmlformats.org/drawingml/2006/main">
             <a:pPr algn="ctr">
-              <a:defRPr sz="1350" b="1">
-                <a:solidFill>
-                  <a:srgbClr val="FFFFFF"/>
+              <a:defRPr sz="1125" b="1">
+                <a:solidFill>
+                  <a:srgbClr val="2F785D"/>
                 </a:solidFill>
                 <a:latin typeface="Arial"/>
                 <a:ea typeface="Arial"/>
@@ -8768,9 +8776,9 @@
               </a:defRPr>
             </a:pPr>
             <a:r>
-              <a:rPr sz="1350" b="1">
-                <a:solidFill>
-                  <a:srgbClr val="FFFFFF"/>
+              <a:rPr sz="1125" b="1">
+                <a:solidFill>
+                  <a:srgbClr val="2F785D"/>
                 </a:solidFill>
                 <a:latin typeface="Arial"/>
                 <a:ea typeface="Arial"/>
@@ -8786,19 +8794,19 @@
           <p:cNvPr id="22" name="">
             <a:extLst xmlns:a="http://schemas.openxmlformats.org/drawingml/2006/main">
               <a:ext uri="{FF2B5EF4-FFF2-40B4-BE49-F238E27FC236}">
-                <a16:creationId xmlns:a16="http://schemas.microsoft.com/office/drawing/2014/main" id="{F5AA636C-D6AF-450B-BD80-FF1D069C3A51}"/>
-              </a:ext>
-            </a:extLst>
-          </p:cNvPr>
-          <p:cNvSpPr>
-            <a:spLocks xmlns:a="http://schemas.openxmlformats.org/drawingml/2006/main" noGrp="1"/>
-          </p:cNvSpPr>
-          <p:nvPr/>
-        </p:nvSpPr>
-        <p:spPr>
-          <a:xfrm xmlns:a="http://schemas.openxmlformats.org/drawingml/2006/main">
-            <a:off x="1714500" y="4410075"/>
-            <a:ext cx="9429750" cy="609600"/>
+                <a16:creationId xmlns:a16="http://schemas.microsoft.com/office/drawing/2014/main" id="{204634A2-F7DE-4A0D-ABB7-BB23389CFD9E}"/>
+              </a:ext>
+            </a:extLst>
+          </p:cNvPr>
+          <p:cNvSpPr>
+            <a:spLocks xmlns:a="http://schemas.openxmlformats.org/drawingml/2006/main" noGrp="1"/>
+          </p:cNvSpPr>
+          <p:nvPr/>
+        </p:nvSpPr>
+        <p:spPr>
+          <a:xfrm xmlns:a="http://schemas.openxmlformats.org/drawingml/2006/main">
+            <a:off x="1714500" y="4743450"/>
+            <a:ext cx="9525000" cy="809625"/>
           </a:xfrm>
           <a:prstGeom xmlns:a="http://schemas.openxmlformats.org/drawingml/2006/main" prst="rect">
             <a:avLst/>
@@ -8815,7 +8823,7 @@
           <a:lstStyle xmlns:a="http://schemas.openxmlformats.org/drawingml/2006/main"/>
           <a:p xmlns:a="http://schemas.openxmlformats.org/drawingml/2006/main">
             <a:pPr algn="l">
-              <a:defRPr sz="1500" b="1">
+              <a:defRPr sz="1725" b="1">
                 <a:solidFill>
                   <a:srgbClr val="2F785D"/>
                 </a:solidFill>
@@ -8825,7 +8833,7 @@
               </a:defRPr>
             </a:pPr>
             <a:r>
-              <a:rPr sz="1500" b="1">
+              <a:rPr sz="1725" b="1">
                 <a:solidFill>
                   <a:srgbClr val="2F785D"/>
                 </a:solidFill>
@@ -8833,7 +8841,7 @@
                 <a:ea typeface="Arial"/>
                 <a:cs typeface="Arial"/>
               </a:rPr>
-              <a:t>Check the result: Include squared units for area and check by decomposition.</a:t>
+              <a:t>108 ÷ 12 = 9 cm</a:t>
             </a:r>
           </a:p>
         </p:txBody>
@@ -8841,7 +8849,7 @@
     </p:spTree>
     <p:extLst>
       <p:ext uri="{BB962C8B-B14F-4D97-AF65-F5344CB8AC3E}">
-        <p14:creationId xmlns:p14="http://schemas.microsoft.com/office/powerpoint/2010/main" val="399405677"/>
+        <p14:creationId xmlns:p14="http://schemas.microsoft.com/office/powerpoint/2010/main" val="629894743"/>
       </p:ext>
     </p:extLst>
   </p:cSld>
@@ -9134,7 +9142,7 @@
           <p:cNvPr id="15" name="">
             <a:extLst xmlns:a="http://schemas.openxmlformats.org/drawingml/2006/main">
               <a:ext uri="{FF2B5EF4-FFF2-40B4-BE49-F238E27FC236}">
-                <a16:creationId xmlns:a16="http://schemas.microsoft.com/office/drawing/2014/main" id="{2C867823-42E9-4F76-9956-123CF2CD2B4A}"/>
+                <a16:creationId xmlns:a16="http://schemas.microsoft.com/office/drawing/2014/main" id="{AA9D542F-C779-41EF-8198-60ED6CF216D7}"/>
               </a:ext>
             </a:extLst>
           </p:cNvPr>
@@ -9166,7 +9174,7 @@
           <p:cNvPr id="2" name="">
             <a:extLst xmlns:a="http://schemas.openxmlformats.org/drawingml/2006/main">
               <a:ext uri="{FF2B5EF4-FFF2-40B4-BE49-F238E27FC236}">
-                <a16:creationId xmlns:a16="http://schemas.microsoft.com/office/drawing/2014/main" id="{ECAF3904-E1A0-4D30-8D3B-DBFF42A89CB0}"/>
+                <a16:creationId xmlns:a16="http://schemas.microsoft.com/office/drawing/2014/main" id="{523768A9-724A-43C7-9ECB-DF8C4C0ECEA5}"/>
               </a:ext>
             </a:extLst>
           </p:cNvPr>
@@ -9223,7 +9231,7 @@
           <p:cNvPr id="3" name="">
             <a:extLst xmlns:a="http://schemas.openxmlformats.org/drawingml/2006/main">
               <a:ext uri="{FF2B5EF4-FFF2-40B4-BE49-F238E27FC236}">
-                <a16:creationId xmlns:a16="http://schemas.microsoft.com/office/drawing/2014/main" id="{CC05A7D9-B58C-4380-B3E0-2316C60A412E}"/>
+                <a16:creationId xmlns:a16="http://schemas.microsoft.com/office/drawing/2014/main" id="{8743B2F8-2307-433E-9FFD-3BCCF18C02AE}"/>
               </a:ext>
             </a:extLst>
           </p:cNvPr>
@@ -9255,7 +9263,7 @@
           <p:cNvPr id="4" name="">
             <a:extLst xmlns:a="http://schemas.openxmlformats.org/drawingml/2006/main">
               <a:ext uri="{FF2B5EF4-FFF2-40B4-BE49-F238E27FC236}">
-                <a16:creationId xmlns:a16="http://schemas.microsoft.com/office/drawing/2014/main" id="{F71C5639-C94D-4FF1-90A0-089A1C1F699D}"/>
+                <a16:creationId xmlns:a16="http://schemas.microsoft.com/office/drawing/2014/main" id="{22D09561-692B-4B03-9F3C-8B58A90665A9}"/>
               </a:ext>
             </a:extLst>
           </p:cNvPr>
@@ -9312,7 +9320,7 @@
           <p:cNvPr id="5" name="">
             <a:extLst xmlns:a="http://schemas.openxmlformats.org/drawingml/2006/main">
               <a:ext uri="{FF2B5EF4-FFF2-40B4-BE49-F238E27FC236}">
-                <a16:creationId xmlns:a16="http://schemas.microsoft.com/office/drawing/2014/main" id="{54B73E23-17D2-4086-BD7D-A9F6C98E923F}"/>
+                <a16:creationId xmlns:a16="http://schemas.microsoft.com/office/drawing/2014/main" id="{8496E4C0-B3C2-4BF2-96DF-FC9D8F4FDF32}"/>
               </a:ext>
             </a:extLst>
           </p:cNvPr>
@@ -9369,7 +9377,7 @@
           <p:cNvPr id="6" name="">
             <a:extLst xmlns:a="http://schemas.openxmlformats.org/drawingml/2006/main">
               <a:ext uri="{FF2B5EF4-FFF2-40B4-BE49-F238E27FC236}">
-                <a16:creationId xmlns:a16="http://schemas.microsoft.com/office/drawing/2014/main" id="{E56AFF7C-9641-452B-B65D-78C9EF94E335}"/>
+                <a16:creationId xmlns:a16="http://schemas.microsoft.com/office/drawing/2014/main" id="{8AD3ACB9-D4FF-4C16-8D52-4204B9632047}"/>
               </a:ext>
             </a:extLst>
           </p:cNvPr>
@@ -9426,7 +9434,7 @@
           <p:cNvPr id="7" name="">
             <a:extLst xmlns:a="http://schemas.openxmlformats.org/drawingml/2006/main">
               <a:ext uri="{FF2B5EF4-FFF2-40B4-BE49-F238E27FC236}">
-                <a16:creationId xmlns:a16="http://schemas.microsoft.com/office/drawing/2014/main" id="{8B4B3821-A41F-4DD4-BB34-F94FB183037F}"/>
+                <a16:creationId xmlns:a16="http://schemas.microsoft.com/office/drawing/2014/main" id="{F167588C-FCEC-4061-AC68-4A6C6AD1AE32}"/>
               </a:ext>
             </a:extLst>
           </p:cNvPr>
@@ -9458,7 +9466,7 @@
           <p:cNvPr id="8" name="">
             <a:extLst xmlns:a="http://schemas.openxmlformats.org/drawingml/2006/main">
               <a:ext uri="{FF2B5EF4-FFF2-40B4-BE49-F238E27FC236}">
-                <a16:creationId xmlns:a16="http://schemas.microsoft.com/office/drawing/2014/main" id="{49DFBB59-80BB-4A14-B0F8-7B3C39EC2B27}"/>
+                <a16:creationId xmlns:a16="http://schemas.microsoft.com/office/drawing/2014/main" id="{B98A4FB3-F6CC-4439-ACD9-0C0F1ABC3726}"/>
               </a:ext>
             </a:extLst>
           </p:cNvPr>
@@ -9515,7 +9523,7 @@
           <p:cNvPr id="9" name="">
             <a:extLst xmlns:a="http://schemas.openxmlformats.org/drawingml/2006/main">
               <a:ext uri="{FF2B5EF4-FFF2-40B4-BE49-F238E27FC236}">
-                <a16:creationId xmlns:a16="http://schemas.microsoft.com/office/drawing/2014/main" id="{A4D7A9B3-8A10-4BE9-BADF-5598965B1724}"/>
+                <a16:creationId xmlns:a16="http://schemas.microsoft.com/office/drawing/2014/main" id="{CC0F05B5-B8E7-428D-AD9D-A56D915FD594}"/>
               </a:ext>
             </a:extLst>
           </p:cNvPr>
@@ -9572,7 +9580,7 @@
           <p:cNvPr id="10" name="">
             <a:extLst xmlns:a="http://schemas.openxmlformats.org/drawingml/2006/main">
               <a:ext uri="{FF2B5EF4-FFF2-40B4-BE49-F238E27FC236}">
-                <a16:creationId xmlns:a16="http://schemas.microsoft.com/office/drawing/2014/main" id="{0086E560-7374-4202-B015-CB49009DF776}"/>
+                <a16:creationId xmlns:a16="http://schemas.microsoft.com/office/drawing/2014/main" id="{F4182ED8-2B56-45F9-95A3-B6696C3F28CC}"/>
               </a:ext>
             </a:extLst>
           </p:cNvPr>
@@ -9629,7 +9637,7 @@
           <p:cNvPr id="11" name="">
             <a:extLst xmlns:a="http://schemas.openxmlformats.org/drawingml/2006/main">
               <a:ext uri="{FF2B5EF4-FFF2-40B4-BE49-F238E27FC236}">
-                <a16:creationId xmlns:a16="http://schemas.microsoft.com/office/drawing/2014/main" id="{57615A1A-5B6B-472B-8D47-E5468955AB5D}"/>
+                <a16:creationId xmlns:a16="http://schemas.microsoft.com/office/drawing/2014/main" id="{08442181-C148-496F-9A49-1F850855AFE0}"/>
               </a:ext>
             </a:extLst>
           </p:cNvPr>
@@ -9686,7 +9694,7 @@
           <p:cNvPr id="12" name="">
             <a:extLst xmlns:a="http://schemas.openxmlformats.org/drawingml/2006/main">
               <a:ext uri="{FF2B5EF4-FFF2-40B4-BE49-F238E27FC236}">
-                <a16:creationId xmlns:a16="http://schemas.microsoft.com/office/drawing/2014/main" id="{B204E73E-C3FD-4463-89BD-FE65E96037F1}"/>
+                <a16:creationId xmlns:a16="http://schemas.microsoft.com/office/drawing/2014/main" id="{F86F0F32-0156-4612-857B-20CAB7139F17}"/>
               </a:ext>
             </a:extLst>
           </p:cNvPr>
@@ -9718,7 +9726,7 @@
           <p:cNvPr id="13" name="">
             <a:extLst xmlns:a="http://schemas.openxmlformats.org/drawingml/2006/main">
               <a:ext uri="{FF2B5EF4-FFF2-40B4-BE49-F238E27FC236}">
-                <a16:creationId xmlns:a16="http://schemas.microsoft.com/office/drawing/2014/main" id="{3214EBDC-E07B-4D35-BBD1-99A4141FDACE}"/>
+                <a16:creationId xmlns:a16="http://schemas.microsoft.com/office/drawing/2014/main" id="{24ABEBF7-B70A-4E1E-9C13-5A31FCD56264}"/>
               </a:ext>
             </a:extLst>
           </p:cNvPr>
@@ -9775,7 +9783,7 @@
           <p:cNvPr id="14" name="">
             <a:extLst xmlns:a="http://schemas.openxmlformats.org/drawingml/2006/main">
               <a:ext uri="{FF2B5EF4-FFF2-40B4-BE49-F238E27FC236}">
-                <a16:creationId xmlns:a16="http://schemas.microsoft.com/office/drawing/2014/main" id="{07ACC80A-DE5B-499E-BAF7-53EB3C1D248B}"/>
+                <a16:creationId xmlns:a16="http://schemas.microsoft.com/office/drawing/2014/main" id="{244953E9-8FDB-465C-9E72-929025D400DF}"/>
               </a:ext>
             </a:extLst>
           </p:cNvPr>
@@ -9830,7 +9838,7 @@
     </p:spTree>
     <p:extLst>
       <p:ext uri="{BB962C8B-B14F-4D97-AF65-F5344CB8AC3E}">
-        <p14:creationId xmlns:p14="http://schemas.microsoft.com/office/powerpoint/2010/main" val="59020506"/>
+        <p14:creationId xmlns:p14="http://schemas.microsoft.com/office/powerpoint/2010/main" val="250511172"/>
       </p:ext>
     </p:extLst>
   </p:cSld>
@@ -10031,7 +10039,7 @@
           <p:cNvPr id="16" name="">
             <a:extLst xmlns:a="http://schemas.openxmlformats.org/drawingml/2006/main">
               <a:ext uri="{FF2B5EF4-FFF2-40B4-BE49-F238E27FC236}">
-                <a16:creationId xmlns:a16="http://schemas.microsoft.com/office/drawing/2014/main" id="{744C4A2A-C71B-44A9-B46B-8E4E814766AC}"/>
+                <a16:creationId xmlns:a16="http://schemas.microsoft.com/office/drawing/2014/main" id="{9B6EE1CB-5D4F-41E5-B5CC-37A4CC365EA9}"/>
               </a:ext>
             </a:extLst>
           </p:cNvPr>
@@ -10063,7 +10071,7 @@
           <p:cNvPr id="2" name="">
             <a:extLst xmlns:a="http://schemas.openxmlformats.org/drawingml/2006/main">
               <a:ext uri="{FF2B5EF4-FFF2-40B4-BE49-F238E27FC236}">
-                <a16:creationId xmlns:a16="http://schemas.microsoft.com/office/drawing/2014/main" id="{E4861A39-C1C5-4697-AF91-C98F0EAF359B}"/>
+                <a16:creationId xmlns:a16="http://schemas.microsoft.com/office/drawing/2014/main" id="{14DCD1B6-E17E-49E4-BA0E-2B98242279ED}"/>
               </a:ext>
             </a:extLst>
           </p:cNvPr>
@@ -10120,7 +10128,7 @@
           <p:cNvPr id="3" name="">
             <a:extLst xmlns:a="http://schemas.openxmlformats.org/drawingml/2006/main">
               <a:ext uri="{FF2B5EF4-FFF2-40B4-BE49-F238E27FC236}">
-                <a16:creationId xmlns:a16="http://schemas.microsoft.com/office/drawing/2014/main" id="{BF0740B1-380D-4849-A6E5-D25E60478F3D}"/>
+                <a16:creationId xmlns:a16="http://schemas.microsoft.com/office/drawing/2014/main" id="{A40A2FBC-5A49-4A75-8BE5-16B2A12A0381}"/>
               </a:ext>
             </a:extLst>
           </p:cNvPr>
@@ -10152,7 +10160,7 @@
           <p:cNvPr id="4" name="">
             <a:extLst xmlns:a="http://schemas.openxmlformats.org/drawingml/2006/main">
               <a:ext uri="{FF2B5EF4-FFF2-40B4-BE49-F238E27FC236}">
-                <a16:creationId xmlns:a16="http://schemas.microsoft.com/office/drawing/2014/main" id="{0D531167-AAF5-433A-8455-B93F1DE348AA}"/>
+                <a16:creationId xmlns:a16="http://schemas.microsoft.com/office/drawing/2014/main" id="{204705EB-2783-4619-8BAE-1565F2367CBC}"/>
               </a:ext>
             </a:extLst>
           </p:cNvPr>
@@ -10209,7 +10217,7 @@
           <p:cNvPr id="5" name="">
             <a:extLst xmlns:a="http://schemas.openxmlformats.org/drawingml/2006/main">
               <a:ext uri="{FF2B5EF4-FFF2-40B4-BE49-F238E27FC236}">
-                <a16:creationId xmlns:a16="http://schemas.microsoft.com/office/drawing/2014/main" id="{7E9CA002-C5C9-43E5-B46F-B693D2CC8340}"/>
+                <a16:creationId xmlns:a16="http://schemas.microsoft.com/office/drawing/2014/main" id="{4D081C66-3B60-48EA-96C1-52B6CA5C4FA7}"/>
               </a:ext>
             </a:extLst>
           </p:cNvPr>
@@ -10266,7 +10274,7 @@
           <p:cNvPr id="6" name="">
             <a:extLst xmlns:a="http://schemas.openxmlformats.org/drawingml/2006/main">
               <a:ext uri="{FF2B5EF4-FFF2-40B4-BE49-F238E27FC236}">
-                <a16:creationId xmlns:a16="http://schemas.microsoft.com/office/drawing/2014/main" id="{3539F541-EFFE-4024-B9EB-E8E537E2925D}"/>
+                <a16:creationId xmlns:a16="http://schemas.microsoft.com/office/drawing/2014/main" id="{07566D8F-AAC7-4519-BBC5-2DBFFA7EE272}"/>
               </a:ext>
             </a:extLst>
           </p:cNvPr>
@@ -10323,7 +10331,7 @@
           <p:cNvPr id="7" name="">
             <a:extLst xmlns:a="http://schemas.openxmlformats.org/drawingml/2006/main">
               <a:ext uri="{FF2B5EF4-FFF2-40B4-BE49-F238E27FC236}">
-                <a16:creationId xmlns:a16="http://schemas.microsoft.com/office/drawing/2014/main" id="{B910BE85-2BE5-4B77-AC0B-17D7F5A4E8C1}"/>
+                <a16:creationId xmlns:a16="http://schemas.microsoft.com/office/drawing/2014/main" id="{357FFEC1-FE82-46E6-AB28-87B021F6B37B}"/>
               </a:ext>
             </a:extLst>
           </p:cNvPr>
@@ -10355,7 +10363,7 @@
           <p:cNvPr id="8" name="">
             <a:extLst xmlns:a="http://schemas.openxmlformats.org/drawingml/2006/main">
               <a:ext uri="{FF2B5EF4-FFF2-40B4-BE49-F238E27FC236}">
-                <a16:creationId xmlns:a16="http://schemas.microsoft.com/office/drawing/2014/main" id="{002F66B5-B9AA-4A41-92BC-4F6C1C1687B1}"/>
+                <a16:creationId xmlns:a16="http://schemas.microsoft.com/office/drawing/2014/main" id="{F3E56CA1-AFE0-4049-878C-C887C1378B08}"/>
               </a:ext>
             </a:extLst>
           </p:cNvPr>
@@ -10412,7 +10420,7 @@
           <p:cNvPr id="9" name="">
             <a:extLst xmlns:a="http://schemas.openxmlformats.org/drawingml/2006/main">
               <a:ext uri="{FF2B5EF4-FFF2-40B4-BE49-F238E27FC236}">
-                <a16:creationId xmlns:a16="http://schemas.microsoft.com/office/drawing/2014/main" id="{177A9AC8-66A0-4363-8D86-D55451D4AA08}"/>
+                <a16:creationId xmlns:a16="http://schemas.microsoft.com/office/drawing/2014/main" id="{F5DA608F-E49B-4557-88C1-CB15E2F12023}"/>
               </a:ext>
             </a:extLst>
           </p:cNvPr>
@@ -10469,7 +10477,7 @@
           <p:cNvPr id="10" name="">
             <a:extLst xmlns:a="http://schemas.openxmlformats.org/drawingml/2006/main">
               <a:ext uri="{FF2B5EF4-FFF2-40B4-BE49-F238E27FC236}">
-                <a16:creationId xmlns:a16="http://schemas.microsoft.com/office/drawing/2014/main" id="{64A56CF1-2555-48D0-BB88-46F581884D8C}"/>
+                <a16:creationId xmlns:a16="http://schemas.microsoft.com/office/drawing/2014/main" id="{3E62B4B4-8922-4D19-ADF9-A21CC1A5999A}"/>
               </a:ext>
             </a:extLst>
           </p:cNvPr>
@@ -10526,7 +10534,7 @@
           <p:cNvPr id="11" name="">
             <a:extLst xmlns:a="http://schemas.openxmlformats.org/drawingml/2006/main">
               <a:ext uri="{FF2B5EF4-FFF2-40B4-BE49-F238E27FC236}">
-                <a16:creationId xmlns:a16="http://schemas.microsoft.com/office/drawing/2014/main" id="{FB80D94A-2574-4A7F-8334-2895CFFF0FC8}"/>
+                <a16:creationId xmlns:a16="http://schemas.microsoft.com/office/drawing/2014/main" id="{B993A4D4-366F-48C3-B84D-C69F543B0E43}"/>
               </a:ext>
             </a:extLst>
           </p:cNvPr>
@@ -10583,7 +10591,7 @@
           <p:cNvPr id="12" name="">
             <a:extLst xmlns:a="http://schemas.openxmlformats.org/drawingml/2006/main">
               <a:ext uri="{FF2B5EF4-FFF2-40B4-BE49-F238E27FC236}">
-                <a16:creationId xmlns:a16="http://schemas.microsoft.com/office/drawing/2014/main" id="{B25E2822-6642-4158-A08D-F7416B3F35EB}"/>
+                <a16:creationId xmlns:a16="http://schemas.microsoft.com/office/drawing/2014/main" id="{91EDCCA3-ABBB-4F23-AAA2-DCEE0321C1D2}"/>
               </a:ext>
             </a:extLst>
           </p:cNvPr>
@@ -10640,7 +10648,7 @@
           <p:cNvPr id="13" name="">
             <a:extLst xmlns:a="http://schemas.openxmlformats.org/drawingml/2006/main">
               <a:ext uri="{FF2B5EF4-FFF2-40B4-BE49-F238E27FC236}">
-                <a16:creationId xmlns:a16="http://schemas.microsoft.com/office/drawing/2014/main" id="{3EDDE11D-0259-4420-9E4D-9E9CDFAABE23}"/>
+                <a16:creationId xmlns:a16="http://schemas.microsoft.com/office/drawing/2014/main" id="{49E0368B-6ADC-437D-8592-A9193ED22CD7}"/>
               </a:ext>
             </a:extLst>
           </p:cNvPr>
@@ -10697,7 +10705,7 @@
           <p:cNvPr id="14" name="">
             <a:extLst xmlns:a="http://schemas.openxmlformats.org/drawingml/2006/main">
               <a:ext uri="{FF2B5EF4-FFF2-40B4-BE49-F238E27FC236}">
-                <a16:creationId xmlns:a16="http://schemas.microsoft.com/office/drawing/2014/main" id="{E5B3B6BB-55AC-4B3C-B577-B7F9F9CD48C1}"/>
+                <a16:creationId xmlns:a16="http://schemas.microsoft.com/office/drawing/2014/main" id="{80CB84E9-2B2A-4550-8A6E-3DE93CD71313}"/>
               </a:ext>
             </a:extLst>
           </p:cNvPr>
@@ -10754,7 +10762,7 @@
           <p:cNvPr id="15" name="">
             <a:extLst xmlns:a="http://schemas.openxmlformats.org/drawingml/2006/main">
               <a:ext uri="{FF2B5EF4-FFF2-40B4-BE49-F238E27FC236}">
-                <a16:creationId xmlns:a16="http://schemas.microsoft.com/office/drawing/2014/main" id="{B6B386FE-1067-4123-BD2A-F5766F2EDDFA}"/>
+                <a16:creationId xmlns:a16="http://schemas.microsoft.com/office/drawing/2014/main" id="{FD202D3D-78D2-4D80-BD5A-6526427720DC}"/>
               </a:ext>
             </a:extLst>
           </p:cNvPr>
@@ -10809,7 +10817,7 @@
     </p:spTree>
     <p:extLst>
       <p:ext uri="{BB962C8B-B14F-4D97-AF65-F5344CB8AC3E}">
-        <p14:creationId xmlns:p14="http://schemas.microsoft.com/office/powerpoint/2010/main" val="2014772183"/>
+        <p14:creationId xmlns:p14="http://schemas.microsoft.com/office/powerpoint/2010/main" val="1368831221"/>
       </p:ext>
     </p:extLst>
   </p:cSld>
@@ -10964,7 +10972,7 @@
           <p:cNvPr id="16" name="">
             <a:extLst xmlns:a="http://schemas.openxmlformats.org/drawingml/2006/main">
               <a:ext uri="{FF2B5EF4-FFF2-40B4-BE49-F238E27FC236}">
-                <a16:creationId xmlns:a16="http://schemas.microsoft.com/office/drawing/2014/main" id="{7E2D0215-8A58-4939-B488-AC95E4E8EA90}"/>
+                <a16:creationId xmlns:a16="http://schemas.microsoft.com/office/drawing/2014/main" id="{4585D2FF-8B2E-44FA-B01D-0E6E5A2ECB95}"/>
               </a:ext>
             </a:extLst>
           </p:cNvPr>
@@ -10996,7 +11004,7 @@
           <p:cNvPr id="2" name="">
             <a:extLst xmlns:a="http://schemas.openxmlformats.org/drawingml/2006/main">
               <a:ext uri="{FF2B5EF4-FFF2-40B4-BE49-F238E27FC236}">
-                <a16:creationId xmlns:a16="http://schemas.microsoft.com/office/drawing/2014/main" id="{0FE181DA-86D4-4AED-AB16-100FA9FB444F}"/>
+                <a16:creationId xmlns:a16="http://schemas.microsoft.com/office/drawing/2014/main" id="{CB40DB56-5D68-47AD-9EFD-F5CA594543BE}"/>
               </a:ext>
             </a:extLst>
           </p:cNvPr>
@@ -11053,7 +11061,7 @@
           <p:cNvPr id="3" name="">
             <a:extLst xmlns:a="http://schemas.openxmlformats.org/drawingml/2006/main">
               <a:ext uri="{FF2B5EF4-FFF2-40B4-BE49-F238E27FC236}">
-                <a16:creationId xmlns:a16="http://schemas.microsoft.com/office/drawing/2014/main" id="{187DB4C4-F2B4-4A89-B688-4DE02BAFF3F6}"/>
+                <a16:creationId xmlns:a16="http://schemas.microsoft.com/office/drawing/2014/main" id="{45D05FA1-2F5C-47E3-918D-8601CB50011C}"/>
               </a:ext>
             </a:extLst>
           </p:cNvPr>
@@ -11085,7 +11093,7 @@
           <p:cNvPr id="4" name="">
             <a:extLst xmlns:a="http://schemas.openxmlformats.org/drawingml/2006/main">
               <a:ext uri="{FF2B5EF4-FFF2-40B4-BE49-F238E27FC236}">
-                <a16:creationId xmlns:a16="http://schemas.microsoft.com/office/drawing/2014/main" id="{145CA81F-60BC-4BE5-B6E2-1E5EDBFCAE2D}"/>
+                <a16:creationId xmlns:a16="http://schemas.microsoft.com/office/drawing/2014/main" id="{70C988A5-D2B1-48A0-A4AB-62D40EF8281C}"/>
               </a:ext>
             </a:extLst>
           </p:cNvPr>
@@ -11142,7 +11150,7 @@
           <p:cNvPr id="5" name="">
             <a:extLst xmlns:a="http://schemas.openxmlformats.org/drawingml/2006/main">
               <a:ext uri="{FF2B5EF4-FFF2-40B4-BE49-F238E27FC236}">
-                <a16:creationId xmlns:a16="http://schemas.microsoft.com/office/drawing/2014/main" id="{70BE0E9A-E22A-4ADD-BE77-21EE966B09CB}"/>
+                <a16:creationId xmlns:a16="http://schemas.microsoft.com/office/drawing/2014/main" id="{27644A74-06A6-4395-BEE4-0FC777C48757}"/>
               </a:ext>
             </a:extLst>
           </p:cNvPr>
@@ -11199,7 +11207,7 @@
           <p:cNvPr id="6" name="">
             <a:extLst xmlns:a="http://schemas.openxmlformats.org/drawingml/2006/main">
               <a:ext uri="{FF2B5EF4-FFF2-40B4-BE49-F238E27FC236}">
-                <a16:creationId xmlns:a16="http://schemas.microsoft.com/office/drawing/2014/main" id="{FAC09663-467A-441C-B04F-8782530F4ED2}"/>
+                <a16:creationId xmlns:a16="http://schemas.microsoft.com/office/drawing/2014/main" id="{C5E31750-39D2-400F-BA3C-AD2821826676}"/>
               </a:ext>
             </a:extLst>
           </p:cNvPr>
@@ -11256,7 +11264,7 @@
           <p:cNvPr id="7" name="">
             <a:extLst xmlns:a="http://schemas.openxmlformats.org/drawingml/2006/main">
               <a:ext uri="{FF2B5EF4-FFF2-40B4-BE49-F238E27FC236}">
-                <a16:creationId xmlns:a16="http://schemas.microsoft.com/office/drawing/2014/main" id="{1BB6F9AF-5C5F-45C5-B788-EA4972A01317}"/>
+                <a16:creationId xmlns:a16="http://schemas.microsoft.com/office/drawing/2014/main" id="{8E0A50EA-AF7E-4903-BA6B-BC147ED45CCC}"/>
               </a:ext>
             </a:extLst>
           </p:cNvPr>
@@ -11288,7 +11296,7 @@
           <p:cNvPr id="8" name="">
             <a:extLst xmlns:a="http://schemas.openxmlformats.org/drawingml/2006/main">
               <a:ext uri="{FF2B5EF4-FFF2-40B4-BE49-F238E27FC236}">
-                <a16:creationId xmlns:a16="http://schemas.microsoft.com/office/drawing/2014/main" id="{3B99AB62-12B9-46ED-AC78-259447DE7C12}"/>
+                <a16:creationId xmlns:a16="http://schemas.microsoft.com/office/drawing/2014/main" id="{2A35A2B7-AA44-4AC0-B996-52D9697513CF}"/>
               </a:ext>
             </a:extLst>
           </p:cNvPr>
@@ -11345,7 +11353,7 @@
           <p:cNvPr id="9" name="">
             <a:extLst xmlns:a="http://schemas.openxmlformats.org/drawingml/2006/main">
               <a:ext uri="{FF2B5EF4-FFF2-40B4-BE49-F238E27FC236}">
-                <a16:creationId xmlns:a16="http://schemas.microsoft.com/office/drawing/2014/main" id="{F89410BE-2973-4D4F-947C-D01DAE594B15}"/>
+                <a16:creationId xmlns:a16="http://schemas.microsoft.com/office/drawing/2014/main" id="{6D3DE529-24D1-4A1F-A155-0D88ACE75578}"/>
               </a:ext>
             </a:extLst>
           </p:cNvPr>
@@ -11406,7 +11414,7 @@
           <p:nvPr/>
         </p:nvPicPr>
         <p:blipFill>
-          <a:blip xmlns:r="http://schemas.openxmlformats.org/officeDocument/2006/relationships" xmlns:a="http://schemas.openxmlformats.org/drawingml/2006/main" r:embed="Ra44f4a3b94364741"/>
+          <a:blip xmlns:r="http://schemas.openxmlformats.org/officeDocument/2006/relationships" xmlns:a="http://schemas.openxmlformats.org/drawingml/2006/main" r:embed="R4bbc037a1be2484d"/>
           <a:stretch xmlns:a="http://schemas.openxmlformats.org/drawingml/2006/main"/>
         </p:blipFill>
         <p:spPr>
@@ -11424,7 +11432,7 @@
           <p:cNvPr id="11" name="">
             <a:extLst xmlns:a="http://schemas.openxmlformats.org/drawingml/2006/main">
               <a:ext uri="{FF2B5EF4-FFF2-40B4-BE49-F238E27FC236}">
-                <a16:creationId xmlns:a16="http://schemas.microsoft.com/office/drawing/2014/main" id="{F59A37D4-D380-41BF-9BEB-4F476887177C}"/>
+                <a16:creationId xmlns:a16="http://schemas.microsoft.com/office/drawing/2014/main" id="{13D2EDB7-A526-4066-A09A-908AB864225B}"/>
               </a:ext>
             </a:extLst>
           </p:cNvPr>
@@ -11481,7 +11489,7 @@
           <p:cNvPr id="12" name="">
             <a:extLst xmlns:a="http://schemas.openxmlformats.org/drawingml/2006/main">
               <a:ext uri="{FF2B5EF4-FFF2-40B4-BE49-F238E27FC236}">
-                <a16:creationId xmlns:a16="http://schemas.microsoft.com/office/drawing/2014/main" id="{46D9A89F-6A16-479C-B589-97AA62BE1D64}"/>
+                <a16:creationId xmlns:a16="http://schemas.microsoft.com/office/drawing/2014/main" id="{AEE90E79-BD7B-4190-B795-1E1FF43E5F7D}"/>
               </a:ext>
             </a:extLst>
           </p:cNvPr>
@@ -11538,7 +11546,7 @@
           <p:cNvPr id="13" name="">
             <a:extLst xmlns:a="http://schemas.openxmlformats.org/drawingml/2006/main">
               <a:ext uri="{FF2B5EF4-FFF2-40B4-BE49-F238E27FC236}">
-                <a16:creationId xmlns:a16="http://schemas.microsoft.com/office/drawing/2014/main" id="{DF0A060B-BE19-4F21-BC84-0AC008B24F7F}"/>
+                <a16:creationId xmlns:a16="http://schemas.microsoft.com/office/drawing/2014/main" id="{5F89FE2E-D135-445E-AC57-7A9A938B8CC9}"/>
               </a:ext>
             </a:extLst>
           </p:cNvPr>
@@ -11570,7 +11578,7 @@
           <p:cNvPr id="14" name="">
             <a:extLst xmlns:a="http://schemas.openxmlformats.org/drawingml/2006/main">
               <a:ext uri="{FF2B5EF4-FFF2-40B4-BE49-F238E27FC236}">
-                <a16:creationId xmlns:a16="http://schemas.microsoft.com/office/drawing/2014/main" id="{07AB93FB-FF2A-41F8-9C24-01750758A55F}"/>
+                <a16:creationId xmlns:a16="http://schemas.microsoft.com/office/drawing/2014/main" id="{298611A6-54D6-4C16-9EDC-DCB78F3B487D}"/>
               </a:ext>
             </a:extLst>
           </p:cNvPr>
@@ -11627,7 +11635,7 @@
           <p:cNvPr id="15" name="">
             <a:extLst xmlns:a="http://schemas.openxmlformats.org/drawingml/2006/main">
               <a:ext uri="{FF2B5EF4-FFF2-40B4-BE49-F238E27FC236}">
-                <a16:creationId xmlns:a16="http://schemas.microsoft.com/office/drawing/2014/main" id="{B5E480E8-0BE9-4FB0-8708-CE7E3DD6B6BB}"/>
+                <a16:creationId xmlns:a16="http://schemas.microsoft.com/office/drawing/2014/main" id="{367938CA-8F07-4963-85DE-6EF66243B4C5}"/>
               </a:ext>
             </a:extLst>
           </p:cNvPr>
@@ -11682,7 +11690,7 @@
     </p:spTree>
     <p:extLst>
       <p:ext uri="{BB962C8B-B14F-4D97-AF65-F5344CB8AC3E}">
-        <p14:creationId xmlns:p14="http://schemas.microsoft.com/office/powerpoint/2010/main" val="1401086799"/>
+        <p14:creationId xmlns:p14="http://schemas.microsoft.com/office/powerpoint/2010/main" val="590995448"/>
       </p:ext>
     </p:extLst>
   </p:cSld>
@@ -11837,7 +11845,7 @@
           <p:cNvPr id="23" name="">
             <a:extLst xmlns:a="http://schemas.openxmlformats.org/drawingml/2006/main">
               <a:ext uri="{FF2B5EF4-FFF2-40B4-BE49-F238E27FC236}">
-                <a16:creationId xmlns:a16="http://schemas.microsoft.com/office/drawing/2014/main" id="{C09395A9-C460-442D-84F0-2DC16E2791BF}"/>
+                <a16:creationId xmlns:a16="http://schemas.microsoft.com/office/drawing/2014/main" id="{D2DCF701-DF5B-460B-862D-A0A434A72676}"/>
               </a:ext>
             </a:extLst>
           </p:cNvPr>
@@ -11869,7 +11877,7 @@
           <p:cNvPr id="2" name="">
             <a:extLst xmlns:a="http://schemas.openxmlformats.org/drawingml/2006/main">
               <a:ext uri="{FF2B5EF4-FFF2-40B4-BE49-F238E27FC236}">
-                <a16:creationId xmlns:a16="http://schemas.microsoft.com/office/drawing/2014/main" id="{63539782-9EB3-4F67-96A1-E18B66A2EB19}"/>
+                <a16:creationId xmlns:a16="http://schemas.microsoft.com/office/drawing/2014/main" id="{90336A40-BD6B-47A4-8FF0-254F3B8CC823}"/>
               </a:ext>
             </a:extLst>
           </p:cNvPr>
@@ -11926,7 +11934,7 @@
           <p:cNvPr id="3" name="">
             <a:extLst xmlns:a="http://schemas.openxmlformats.org/drawingml/2006/main">
               <a:ext uri="{FF2B5EF4-FFF2-40B4-BE49-F238E27FC236}">
-                <a16:creationId xmlns:a16="http://schemas.microsoft.com/office/drawing/2014/main" id="{761CBE06-1B17-4F57-9E29-251D18662746}"/>
+                <a16:creationId xmlns:a16="http://schemas.microsoft.com/office/drawing/2014/main" id="{BD9A19EB-46D1-4F15-A828-40A021510C8A}"/>
               </a:ext>
             </a:extLst>
           </p:cNvPr>
@@ -11958,7 +11966,7 @@
           <p:cNvPr id="4" name="">
             <a:extLst xmlns:a="http://schemas.openxmlformats.org/drawingml/2006/main">
               <a:ext uri="{FF2B5EF4-FFF2-40B4-BE49-F238E27FC236}">
-                <a16:creationId xmlns:a16="http://schemas.microsoft.com/office/drawing/2014/main" id="{A00435DB-00E7-46FB-9560-4ED5F1612837}"/>
+                <a16:creationId xmlns:a16="http://schemas.microsoft.com/office/drawing/2014/main" id="{FAD02157-0B0C-4240-ACA3-776CB52BC684}"/>
               </a:ext>
             </a:extLst>
           </p:cNvPr>
@@ -12015,7 +12023,7 @@
           <p:cNvPr id="5" name="">
             <a:extLst xmlns:a="http://schemas.openxmlformats.org/drawingml/2006/main">
               <a:ext uri="{FF2B5EF4-FFF2-40B4-BE49-F238E27FC236}">
-                <a16:creationId xmlns:a16="http://schemas.microsoft.com/office/drawing/2014/main" id="{F8E7F773-01F0-4D67-B12B-61DFDCBAF47D}"/>
+                <a16:creationId xmlns:a16="http://schemas.microsoft.com/office/drawing/2014/main" id="{ED42A974-8AA3-4D72-819A-41626CA2A8C2}"/>
               </a:ext>
             </a:extLst>
           </p:cNvPr>
@@ -12072,7 +12080,7 @@
           <p:cNvPr id="6" name="">
             <a:extLst xmlns:a="http://schemas.openxmlformats.org/drawingml/2006/main">
               <a:ext uri="{FF2B5EF4-FFF2-40B4-BE49-F238E27FC236}">
-                <a16:creationId xmlns:a16="http://schemas.microsoft.com/office/drawing/2014/main" id="{24856FE7-3CC8-4005-80E2-0AD206956822}"/>
+                <a16:creationId xmlns:a16="http://schemas.microsoft.com/office/drawing/2014/main" id="{7C9A7D49-300B-441B-81DA-EF8262AF4AB8}"/>
               </a:ext>
             </a:extLst>
           </p:cNvPr>
@@ -12129,7 +12137,7 @@
           <p:cNvPr id="7" name="">
             <a:extLst xmlns:a="http://schemas.openxmlformats.org/drawingml/2006/main">
               <a:ext uri="{FF2B5EF4-FFF2-40B4-BE49-F238E27FC236}">
-                <a16:creationId xmlns:a16="http://schemas.microsoft.com/office/drawing/2014/main" id="{AD89CF2A-A18C-4C74-9EAB-28F896C84F23}"/>
+                <a16:creationId xmlns:a16="http://schemas.microsoft.com/office/drawing/2014/main" id="{C23FE247-093E-4D52-A479-74990A48BFB0}"/>
               </a:ext>
             </a:extLst>
           </p:cNvPr>
@@ -12161,7 +12169,7 @@
           <p:cNvPr id="8" name="">
             <a:extLst xmlns:a="http://schemas.openxmlformats.org/drawingml/2006/main">
               <a:ext uri="{FF2B5EF4-FFF2-40B4-BE49-F238E27FC236}">
-                <a16:creationId xmlns:a16="http://schemas.microsoft.com/office/drawing/2014/main" id="{551E32D4-3FFF-4D85-A9B3-B7C706EBDDA5}"/>
+                <a16:creationId xmlns:a16="http://schemas.microsoft.com/office/drawing/2014/main" id="{883501E9-CD2F-4657-99C7-972096892AA7}"/>
               </a:ext>
             </a:extLst>
           </p:cNvPr>
@@ -12218,7 +12226,7 @@
           <p:cNvPr id="9" name="">
             <a:extLst xmlns:a="http://schemas.openxmlformats.org/drawingml/2006/main">
               <a:ext uri="{FF2B5EF4-FFF2-40B4-BE49-F238E27FC236}">
-                <a16:creationId xmlns:a16="http://schemas.microsoft.com/office/drawing/2014/main" id="{33DF4AED-ACC3-4C12-8785-1DECAC81453A}"/>
+                <a16:creationId xmlns:a16="http://schemas.microsoft.com/office/drawing/2014/main" id="{9F2628DF-D88D-4CEF-9195-FFD390522C41}"/>
               </a:ext>
             </a:extLst>
           </p:cNvPr>
@@ -12275,7 +12283,7 @@
           <p:cNvPr id="10" name="">
             <a:extLst xmlns:a="http://schemas.openxmlformats.org/drawingml/2006/main">
               <a:ext uri="{FF2B5EF4-FFF2-40B4-BE49-F238E27FC236}">
-                <a16:creationId xmlns:a16="http://schemas.microsoft.com/office/drawing/2014/main" id="{80A69C49-1A5A-4292-A95E-D1B548863283}"/>
+                <a16:creationId xmlns:a16="http://schemas.microsoft.com/office/drawing/2014/main" id="{CF421626-CB80-4A41-B059-1501138527C8}"/>
               </a:ext>
             </a:extLst>
           </p:cNvPr>
@@ -12309,7 +12317,7 @@
           <p:cNvPr id="11" name="">
             <a:extLst xmlns:a="http://schemas.openxmlformats.org/drawingml/2006/main">
               <a:ext uri="{FF2B5EF4-FFF2-40B4-BE49-F238E27FC236}">
-                <a16:creationId xmlns:a16="http://schemas.microsoft.com/office/drawing/2014/main" id="{64062B3D-B992-44A7-BB64-5051DC09A3B0}"/>
+                <a16:creationId xmlns:a16="http://schemas.microsoft.com/office/drawing/2014/main" id="{1C50BE78-F0DE-4EE8-9EF0-DB8D4D53A2B3}"/>
               </a:ext>
             </a:extLst>
           </p:cNvPr>
@@ -12341,7 +12349,7 @@
           <p:cNvPr id="12" name="">
             <a:extLst xmlns:a="http://schemas.openxmlformats.org/drawingml/2006/main">
               <a:ext uri="{FF2B5EF4-FFF2-40B4-BE49-F238E27FC236}">
-                <a16:creationId xmlns:a16="http://schemas.microsoft.com/office/drawing/2014/main" id="{88B55503-54CB-4AFB-B473-856BC395350C}"/>
+                <a16:creationId xmlns:a16="http://schemas.microsoft.com/office/drawing/2014/main" id="{09D33045-C621-45EA-9A5F-97FF87F969BB}"/>
               </a:ext>
             </a:extLst>
           </p:cNvPr>
@@ -12398,7 +12406,7 @@
           <p:cNvPr id="13" name="">
             <a:extLst xmlns:a="http://schemas.openxmlformats.org/drawingml/2006/main">
               <a:ext uri="{FF2B5EF4-FFF2-40B4-BE49-F238E27FC236}">
-                <a16:creationId xmlns:a16="http://schemas.microsoft.com/office/drawing/2014/main" id="{8D5E6025-5E8E-488F-9BA2-E4EDBBC04901}"/>
+                <a16:creationId xmlns:a16="http://schemas.microsoft.com/office/drawing/2014/main" id="{0398B3AE-BF70-4029-B052-87941D235487}"/>
               </a:ext>
             </a:extLst>
           </p:cNvPr>
@@ -12455,7 +12463,7 @@
           <p:cNvPr id="14" name="">
             <a:extLst xmlns:a="http://schemas.openxmlformats.org/drawingml/2006/main">
               <a:ext uri="{FF2B5EF4-FFF2-40B4-BE49-F238E27FC236}">
-                <a16:creationId xmlns:a16="http://schemas.microsoft.com/office/drawing/2014/main" id="{32513E24-0623-4327-9608-7CFEBCA2BC64}"/>
+                <a16:creationId xmlns:a16="http://schemas.microsoft.com/office/drawing/2014/main" id="{88A12DDD-54CB-4B0D-8619-F0187B21CF55}"/>
               </a:ext>
             </a:extLst>
           </p:cNvPr>
@@ -12489,7 +12497,7 @@
           <p:cNvPr id="15" name="">
             <a:extLst xmlns:a="http://schemas.openxmlformats.org/drawingml/2006/main">
               <a:ext uri="{FF2B5EF4-FFF2-40B4-BE49-F238E27FC236}">
-                <a16:creationId xmlns:a16="http://schemas.microsoft.com/office/drawing/2014/main" id="{912BF582-D14C-4C63-A939-603737E3885D}"/>
+                <a16:creationId xmlns:a16="http://schemas.microsoft.com/office/drawing/2014/main" id="{1687459A-5DA7-497A-93BA-C34FBFACA790}"/>
               </a:ext>
             </a:extLst>
           </p:cNvPr>
@@ -12521,7 +12529,7 @@
           <p:cNvPr id="16" name="">
             <a:extLst xmlns:a="http://schemas.openxmlformats.org/drawingml/2006/main">
               <a:ext uri="{FF2B5EF4-FFF2-40B4-BE49-F238E27FC236}">
-                <a16:creationId xmlns:a16="http://schemas.microsoft.com/office/drawing/2014/main" id="{048F01A4-06A6-43A3-BEFE-E28BEDEF3C88}"/>
+                <a16:creationId xmlns:a16="http://schemas.microsoft.com/office/drawing/2014/main" id="{2B9E5864-D20E-4736-9FCE-3E8185C198A6}"/>
               </a:ext>
             </a:extLst>
           </p:cNvPr>
@@ -12578,7 +12586,7 @@
           <p:cNvPr id="17" name="">
             <a:extLst xmlns:a="http://schemas.openxmlformats.org/drawingml/2006/main">
               <a:ext uri="{FF2B5EF4-FFF2-40B4-BE49-F238E27FC236}">
-                <a16:creationId xmlns:a16="http://schemas.microsoft.com/office/drawing/2014/main" id="{5EA75C70-62E5-4883-8998-7147DF9B4BAD}"/>
+                <a16:creationId xmlns:a16="http://schemas.microsoft.com/office/drawing/2014/main" id="{176711A8-4033-4DC3-A2BF-B70DC70E198C}"/>
               </a:ext>
             </a:extLst>
           </p:cNvPr>
@@ -12635,7 +12643,7 @@
           <p:cNvPr id="18" name="">
             <a:extLst xmlns:a="http://schemas.openxmlformats.org/drawingml/2006/main">
               <a:ext uri="{FF2B5EF4-FFF2-40B4-BE49-F238E27FC236}">
-                <a16:creationId xmlns:a16="http://schemas.microsoft.com/office/drawing/2014/main" id="{56882E00-BC7F-4A81-908F-F494A006B91D}"/>
+                <a16:creationId xmlns:a16="http://schemas.microsoft.com/office/drawing/2014/main" id="{8158B141-55D3-49B2-B8D5-3B9C144E8D49}"/>
               </a:ext>
             </a:extLst>
           </p:cNvPr>
@@ -12669,7 +12677,7 @@
           <p:cNvPr id="19" name="">
             <a:extLst xmlns:a="http://schemas.openxmlformats.org/drawingml/2006/main">
               <a:ext uri="{FF2B5EF4-FFF2-40B4-BE49-F238E27FC236}">
-                <a16:creationId xmlns:a16="http://schemas.microsoft.com/office/drawing/2014/main" id="{2A65CC9B-3072-4520-87B2-6BD01D8C3534}"/>
+                <a16:creationId xmlns:a16="http://schemas.microsoft.com/office/drawing/2014/main" id="{EA551DC5-956F-4B2C-8E87-0E4FE3AC34F4}"/>
               </a:ext>
             </a:extLst>
           </p:cNvPr>
@@ -12701,7 +12709,7 @@
           <p:cNvPr id="20" name="">
             <a:extLst xmlns:a="http://schemas.openxmlformats.org/drawingml/2006/main">
               <a:ext uri="{FF2B5EF4-FFF2-40B4-BE49-F238E27FC236}">
-                <a16:creationId xmlns:a16="http://schemas.microsoft.com/office/drawing/2014/main" id="{10B4594B-8905-468A-B07D-AF07FE6DF87E}"/>
+                <a16:creationId xmlns:a16="http://schemas.microsoft.com/office/drawing/2014/main" id="{A762E3B3-4651-4AC5-B8C3-82C91A006C05}"/>
               </a:ext>
             </a:extLst>
           </p:cNvPr>
@@ -12758,7 +12766,7 @@
           <p:cNvPr id="21" name="">
             <a:extLst xmlns:a="http://schemas.openxmlformats.org/drawingml/2006/main">
               <a:ext uri="{FF2B5EF4-FFF2-40B4-BE49-F238E27FC236}">
-                <a16:creationId xmlns:a16="http://schemas.microsoft.com/office/drawing/2014/main" id="{23808CC5-4B4A-434E-A0FD-E42EB8AC4E11}"/>
+                <a16:creationId xmlns:a16="http://schemas.microsoft.com/office/drawing/2014/main" id="{78F023ED-602B-4BBD-97C3-EFCAA0133715}"/>
               </a:ext>
             </a:extLst>
           </p:cNvPr>
@@ -12815,7 +12823,7 @@
           <p:cNvPr id="22" name="">
             <a:extLst xmlns:a="http://schemas.openxmlformats.org/drawingml/2006/main">
               <a:ext uri="{FF2B5EF4-FFF2-40B4-BE49-F238E27FC236}">
-                <a16:creationId xmlns:a16="http://schemas.microsoft.com/office/drawing/2014/main" id="{06EA0F96-B2A4-4A66-A938-3343BB05C4D6}"/>
+                <a16:creationId xmlns:a16="http://schemas.microsoft.com/office/drawing/2014/main" id="{1B54D9A3-FB66-4FF4-9198-3FDC539CEE94}"/>
               </a:ext>
             </a:extLst>
           </p:cNvPr>
@@ -12870,7 +12878,7 @@
     </p:spTree>
     <p:extLst>
       <p:ext uri="{BB962C8B-B14F-4D97-AF65-F5344CB8AC3E}">
-        <p14:creationId xmlns:p14="http://schemas.microsoft.com/office/powerpoint/2010/main" val="499941996"/>
+        <p14:creationId xmlns:p14="http://schemas.microsoft.com/office/powerpoint/2010/main" val="1057167002"/>
       </p:ext>
     </p:extLst>
   </p:cSld>
@@ -13071,7 +13079,7 @@
           <p:cNvPr id="22" name="">
             <a:extLst xmlns:a="http://schemas.openxmlformats.org/drawingml/2006/main">
               <a:ext uri="{FF2B5EF4-FFF2-40B4-BE49-F238E27FC236}">
-                <a16:creationId xmlns:a16="http://schemas.microsoft.com/office/drawing/2014/main" id="{49CBF5C8-B805-4856-ACCF-63022A1925D2}"/>
+                <a16:creationId xmlns:a16="http://schemas.microsoft.com/office/drawing/2014/main" id="{AAD145FA-6BB4-4B52-9514-949C692B51C2}"/>
               </a:ext>
             </a:extLst>
           </p:cNvPr>
@@ -13103,7 +13111,7 @@
           <p:cNvPr id="2" name="">
             <a:extLst xmlns:a="http://schemas.openxmlformats.org/drawingml/2006/main">
               <a:ext uri="{FF2B5EF4-FFF2-40B4-BE49-F238E27FC236}">
-                <a16:creationId xmlns:a16="http://schemas.microsoft.com/office/drawing/2014/main" id="{D7159538-4AE5-4396-9FD6-CA644B203212}"/>
+                <a16:creationId xmlns:a16="http://schemas.microsoft.com/office/drawing/2014/main" id="{9F43DA65-1642-4BA0-B11A-12F4DA0AA117}"/>
               </a:ext>
             </a:extLst>
           </p:cNvPr>
@@ -13160,7 +13168,7 @@
           <p:cNvPr id="3" name="">
             <a:extLst xmlns:a="http://schemas.openxmlformats.org/drawingml/2006/main">
               <a:ext uri="{FF2B5EF4-FFF2-40B4-BE49-F238E27FC236}">
-                <a16:creationId xmlns:a16="http://schemas.microsoft.com/office/drawing/2014/main" id="{6BA9A65F-8B09-44E7-A29A-B61AFC49D3A4}"/>
+                <a16:creationId xmlns:a16="http://schemas.microsoft.com/office/drawing/2014/main" id="{E03BEBCD-F57F-4B99-909C-FDD370CB90F3}"/>
               </a:ext>
             </a:extLst>
           </p:cNvPr>
@@ -13192,7 +13200,7 @@
           <p:cNvPr id="4" name="">
             <a:extLst xmlns:a="http://schemas.openxmlformats.org/drawingml/2006/main">
               <a:ext uri="{FF2B5EF4-FFF2-40B4-BE49-F238E27FC236}">
-                <a16:creationId xmlns:a16="http://schemas.microsoft.com/office/drawing/2014/main" id="{0ED44AE9-C5A3-413B-9D47-802FC0D6ED67}"/>
+                <a16:creationId xmlns:a16="http://schemas.microsoft.com/office/drawing/2014/main" id="{5E9CBA9D-B0EA-46F8-BA7E-960989F916CD}"/>
               </a:ext>
             </a:extLst>
           </p:cNvPr>
@@ -13249,7 +13257,7 @@
           <p:cNvPr id="5" name="">
             <a:extLst xmlns:a="http://schemas.openxmlformats.org/drawingml/2006/main">
               <a:ext uri="{FF2B5EF4-FFF2-40B4-BE49-F238E27FC236}">
-                <a16:creationId xmlns:a16="http://schemas.microsoft.com/office/drawing/2014/main" id="{1A0E7884-146B-484B-98C7-23FF147FDF26}"/>
+                <a16:creationId xmlns:a16="http://schemas.microsoft.com/office/drawing/2014/main" id="{0B392F0D-51BD-422D-BE61-09D7802AD85A}"/>
               </a:ext>
             </a:extLst>
           </p:cNvPr>
@@ -13306,7 +13314,7 @@
           <p:cNvPr id="6" name="">
             <a:extLst xmlns:a="http://schemas.openxmlformats.org/drawingml/2006/main">
               <a:ext uri="{FF2B5EF4-FFF2-40B4-BE49-F238E27FC236}">
-                <a16:creationId xmlns:a16="http://schemas.microsoft.com/office/drawing/2014/main" id="{ABCCD7D1-2ABB-472C-85FB-474D52D40555}"/>
+                <a16:creationId xmlns:a16="http://schemas.microsoft.com/office/drawing/2014/main" id="{9BD75927-7503-43D0-AEB3-62487EEA2DD2}"/>
               </a:ext>
             </a:extLst>
           </p:cNvPr>
@@ -13363,7 +13371,7 @@
           <p:cNvPr id="7" name="">
             <a:extLst xmlns:a="http://schemas.openxmlformats.org/drawingml/2006/main">
               <a:ext uri="{FF2B5EF4-FFF2-40B4-BE49-F238E27FC236}">
-                <a16:creationId xmlns:a16="http://schemas.microsoft.com/office/drawing/2014/main" id="{11E659E0-2940-489B-B81D-808CE905888A}"/>
+                <a16:creationId xmlns:a16="http://schemas.microsoft.com/office/drawing/2014/main" id="{C96988B5-5B81-4610-AB8C-7F53D318F5AB}"/>
               </a:ext>
             </a:extLst>
           </p:cNvPr>
@@ -13395,7 +13403,7 @@
           <p:cNvPr id="8" name="">
             <a:extLst xmlns:a="http://schemas.openxmlformats.org/drawingml/2006/main">
               <a:ext uri="{FF2B5EF4-FFF2-40B4-BE49-F238E27FC236}">
-                <a16:creationId xmlns:a16="http://schemas.microsoft.com/office/drawing/2014/main" id="{A1823B23-74DE-403B-8CA4-BD7672F538C3}"/>
+                <a16:creationId xmlns:a16="http://schemas.microsoft.com/office/drawing/2014/main" id="{BDF62760-D87B-4E40-9FDE-72A1778102CC}"/>
               </a:ext>
             </a:extLst>
           </p:cNvPr>
@@ -13452,7 +13460,7 @@
           <p:cNvPr id="9" name="">
             <a:extLst xmlns:a="http://schemas.openxmlformats.org/drawingml/2006/main">
               <a:ext uri="{FF2B5EF4-FFF2-40B4-BE49-F238E27FC236}">
-                <a16:creationId xmlns:a16="http://schemas.microsoft.com/office/drawing/2014/main" id="{D598A492-5D55-4A15-8288-98658D086D11}"/>
+                <a16:creationId xmlns:a16="http://schemas.microsoft.com/office/drawing/2014/main" id="{33F12E6B-0DE3-49FE-B72C-A0C7D4F7ECA6}"/>
               </a:ext>
             </a:extLst>
           </p:cNvPr>
@@ -13509,7 +13517,7 @@
           <p:cNvPr id="10" name="">
             <a:extLst xmlns:a="http://schemas.openxmlformats.org/drawingml/2006/main">
               <a:ext uri="{FF2B5EF4-FFF2-40B4-BE49-F238E27FC236}">
-                <a16:creationId xmlns:a16="http://schemas.microsoft.com/office/drawing/2014/main" id="{5DFBF504-72CD-4B18-96E0-CDBE10BD5A07}"/>
+                <a16:creationId xmlns:a16="http://schemas.microsoft.com/office/drawing/2014/main" id="{48F58C7D-36C7-4FFF-BCCC-1394C4A53135}"/>
               </a:ext>
             </a:extLst>
           </p:cNvPr>
@@ -13543,7 +13551,7 @@
           <p:cNvPr id="11" name="">
             <a:extLst xmlns:a="http://schemas.openxmlformats.org/drawingml/2006/main">
               <a:ext uri="{FF2B5EF4-FFF2-40B4-BE49-F238E27FC236}">
-                <a16:creationId xmlns:a16="http://schemas.microsoft.com/office/drawing/2014/main" id="{5BDF75A0-A4E1-48D4-87D5-BC3A84395BD2}"/>
+                <a16:creationId xmlns:a16="http://schemas.microsoft.com/office/drawing/2014/main" id="{32EA3B63-999E-41FE-ADE0-63D1DF1CAABD}"/>
               </a:ext>
             </a:extLst>
           </p:cNvPr>
@@ -13575,7 +13583,7 @@
           <p:cNvPr id="12" name="">
             <a:extLst xmlns:a="http://schemas.openxmlformats.org/drawingml/2006/main">
               <a:ext uri="{FF2B5EF4-FFF2-40B4-BE49-F238E27FC236}">
-                <a16:creationId xmlns:a16="http://schemas.microsoft.com/office/drawing/2014/main" id="{B71DA4C8-62AC-4123-A1D1-F0CEDE982D50}"/>
+                <a16:creationId xmlns:a16="http://schemas.microsoft.com/office/drawing/2014/main" id="{377197DF-1467-4D9C-876E-575775BDCE07}"/>
               </a:ext>
             </a:extLst>
           </p:cNvPr>
@@ -13632,7 +13640,7 @@
           <p:cNvPr id="13" name="">
             <a:extLst xmlns:a="http://schemas.openxmlformats.org/drawingml/2006/main">
               <a:ext uri="{FF2B5EF4-FFF2-40B4-BE49-F238E27FC236}">
-                <a16:creationId xmlns:a16="http://schemas.microsoft.com/office/drawing/2014/main" id="{1F6EEF88-A9F5-4AE4-BCCF-995DCD78F797}"/>
+                <a16:creationId xmlns:a16="http://schemas.microsoft.com/office/drawing/2014/main" id="{0B23DC24-E858-43A7-8D1E-6FEFB22CE826}"/>
               </a:ext>
             </a:extLst>
           </p:cNvPr>
@@ -13689,7 +13697,7 @@
           <p:cNvPr id="14" name="">
             <a:extLst xmlns:a="http://schemas.openxmlformats.org/drawingml/2006/main">
               <a:ext uri="{FF2B5EF4-FFF2-40B4-BE49-F238E27FC236}">
-                <a16:creationId xmlns:a16="http://schemas.microsoft.com/office/drawing/2014/main" id="{D7F73F05-2E98-4AFD-A057-D7C78B7DFC33}"/>
+                <a16:creationId xmlns:a16="http://schemas.microsoft.com/office/drawing/2014/main" id="{9428CBC5-1F5E-45A1-B90C-643D1C22B1A1}"/>
               </a:ext>
             </a:extLst>
           </p:cNvPr>
@@ -13723,7 +13731,7 @@
           <p:cNvPr id="15" name="">
             <a:extLst xmlns:a="http://schemas.openxmlformats.org/drawingml/2006/main">
               <a:ext uri="{FF2B5EF4-FFF2-40B4-BE49-F238E27FC236}">
-                <a16:creationId xmlns:a16="http://schemas.microsoft.com/office/drawing/2014/main" id="{3F2B4B8C-FD2B-43E2-BAD4-72831871F799}"/>
+                <a16:creationId xmlns:a16="http://schemas.microsoft.com/office/drawing/2014/main" id="{3C373602-0ACC-42B5-8FEE-AA1EEF0196B4}"/>
               </a:ext>
             </a:extLst>
           </p:cNvPr>
@@ -13755,7 +13763,7 @@
           <p:cNvPr id="16" name="">
             <a:extLst xmlns:a="http://schemas.openxmlformats.org/drawingml/2006/main">
               <a:ext uri="{FF2B5EF4-FFF2-40B4-BE49-F238E27FC236}">
-                <a16:creationId xmlns:a16="http://schemas.microsoft.com/office/drawing/2014/main" id="{448E9B78-52D7-4DC5-A48E-134334D7B71A}"/>
+                <a16:creationId xmlns:a16="http://schemas.microsoft.com/office/drawing/2014/main" id="{71BA7027-8F3D-419F-8BE2-64DE854E33B3}"/>
               </a:ext>
             </a:extLst>
           </p:cNvPr>
@@ -13812,7 +13820,7 @@
           <p:cNvPr id="17" name="">
             <a:extLst xmlns:a="http://schemas.openxmlformats.org/drawingml/2006/main">
               <a:ext uri="{FF2B5EF4-FFF2-40B4-BE49-F238E27FC236}">
-                <a16:creationId xmlns:a16="http://schemas.microsoft.com/office/drawing/2014/main" id="{4BD645FE-6EF1-41A8-88F9-5709A99F6563}"/>
+                <a16:creationId xmlns:a16="http://schemas.microsoft.com/office/drawing/2014/main" id="{F110856C-2AFC-41F3-B1EC-B60AEADF10C0}"/>
               </a:ext>
             </a:extLst>
           </p:cNvPr>
@@ -13869,7 +13877,7 @@
           <p:cNvPr id="18" name="">
             <a:extLst xmlns:a="http://schemas.openxmlformats.org/drawingml/2006/main">
               <a:ext uri="{FF2B5EF4-FFF2-40B4-BE49-F238E27FC236}">
-                <a16:creationId xmlns:a16="http://schemas.microsoft.com/office/drawing/2014/main" id="{F775B0AF-A3B4-4053-8F37-7EAC17A70E61}"/>
+                <a16:creationId xmlns:a16="http://schemas.microsoft.com/office/drawing/2014/main" id="{69AEE8A7-8548-46FE-A805-7732E3D1577D}"/>
               </a:ext>
             </a:extLst>
           </p:cNvPr>
@@ -13903,7 +13911,7 @@
           <p:cNvPr id="19" name="">
             <a:extLst xmlns:a="http://schemas.openxmlformats.org/drawingml/2006/main">
               <a:ext uri="{FF2B5EF4-FFF2-40B4-BE49-F238E27FC236}">
-                <a16:creationId xmlns:a16="http://schemas.microsoft.com/office/drawing/2014/main" id="{2C3BEF7D-71F8-4B79-9BC9-939B3CA22D02}"/>
+                <a16:creationId xmlns:a16="http://schemas.microsoft.com/office/drawing/2014/main" id="{4872EA5E-2E7B-45F9-AC77-FB0D4CCD085D}"/>
               </a:ext>
             </a:extLst>
           </p:cNvPr>
@@ -13935,7 +13943,7 @@
           <p:cNvPr id="20" name="">
             <a:extLst xmlns:a="http://schemas.openxmlformats.org/drawingml/2006/main">
               <a:ext uri="{FF2B5EF4-FFF2-40B4-BE49-F238E27FC236}">
-                <a16:creationId xmlns:a16="http://schemas.microsoft.com/office/drawing/2014/main" id="{97BC9154-1C3C-4FA7-A7E0-A6F7224DF581}"/>
+                <a16:creationId xmlns:a16="http://schemas.microsoft.com/office/drawing/2014/main" id="{163E960E-F294-4047-995B-AB2CFC6D577D}"/>
               </a:ext>
             </a:extLst>
           </p:cNvPr>
@@ -13992,7 +14000,7 @@
           <p:cNvPr id="21" name="">
             <a:extLst xmlns:a="http://schemas.openxmlformats.org/drawingml/2006/main">
               <a:ext uri="{FF2B5EF4-FFF2-40B4-BE49-F238E27FC236}">
-                <a16:creationId xmlns:a16="http://schemas.microsoft.com/office/drawing/2014/main" id="{D46173EA-7355-44C1-B0A0-004206DB6FC5}"/>
+                <a16:creationId xmlns:a16="http://schemas.microsoft.com/office/drawing/2014/main" id="{9136F785-8D50-4F09-8ED0-BF40FB558523}"/>
               </a:ext>
             </a:extLst>
           </p:cNvPr>
@@ -14047,7 +14055,7 @@
     </p:spTree>
     <p:extLst>
       <p:ext uri="{BB962C8B-B14F-4D97-AF65-F5344CB8AC3E}">
-        <p14:creationId xmlns:p14="http://schemas.microsoft.com/office/powerpoint/2010/main" val="553660382"/>
+        <p14:creationId xmlns:p14="http://schemas.microsoft.com/office/powerpoint/2010/main" val="1980384979"/>
       </p:ext>
     </p:extLst>
   </p:cSld>
